--- a/Planning docs/Slides/lesson-25-4-teacher-slides.pptx
+++ b/Planning docs/Slides/lesson-25-4-teacher-slides.pptx
@@ -16,11 +16,9 @@
     <p:sldId id="264" r:id="rId10"/>
     <p:sldId id="265" r:id="rId11"/>
     <p:sldId id="266" r:id="rId12"/>
-    <p:sldId id="267" r:id="rId13"/>
-    <p:sldId id="268" r:id="rId14"/>
   </p:sldIdLst>
   <p:notesMasterIdLst>
-    <p:notesMasterId r:id="rId15"/>
+    <p:notesMasterId r:id="rId13"/>
   </p:notesMasterIdLst>
   <p:sldSz cx="9144000" cy="5143500"/>
   <p:notesSz cx="5143500" cy="9144000"/>
@@ -514,7 +512,7 @@
           <a:p>
             <a:r>
               <a:rPr lang="en-US" dirty="0"/>
-              <a:t>Title slide for Week 25 Day 4. The Lion, the Witch and the Wardrobe.</a:t>
+              <a:t>Lesson 25.4. Reading: Reading: Ch. 1–3.</a:t>
             </a:r>
             <a:endParaRPr lang="en-US" dirty="0"/>
           </a:p>
@@ -602,7 +600,7 @@
           <a:p>
             <a:r>
               <a:rPr lang="en-US" dirty="0"/>
-              <a:t>Review morphology focus. Have students identify the base word and affix in each example.</a:t>
+              <a:t>Break the word into base + word part. Ask what the part adds to the meaning.</a:t>
             </a:r>
             <a:endParaRPr lang="en-US" dirty="0"/>
           </a:p>
@@ -690,7 +688,7 @@
           <a:p>
             <a:r>
               <a:rPr lang="en-US" dirty="0"/>
-              <a:t>Reading focus slide. Use pause-and-think questions during reading. Copywork can be done after reading.</a:t>
+              <a:t>Read the chapters, then return to the pause questions.</a:t>
             </a:r>
             <a:endParaRPr lang="en-US" dirty="0"/>
           </a:p>
@@ -714,182 +712,6 @@
             <a:fld id="{F7021451-1387-4CA6-816F-3879F97B5CBC}" type="slidenum">
               <a:rPr lang="en-US"/>
               <a:t>11</a:t>
-            </a:fld>
-            <a:endParaRPr lang="en-US"/>
-          </a:p>
-        </p:txBody>
-      </p:sp>
-    </p:spTree>
-    <p:extLst>
-      <p:ext uri="{BB962C8B-B14F-4D97-AF65-F5344CB8AC3E}">
-        <p14:creationId xmlns:p14="http://schemas.microsoft.com/office/powerpoint/2010/main" val="1024086991"/>
-      </p:ext>
-    </p:extLst>
-  </p:cSld>
-  <p:clrMapOvr>
-    <a:masterClrMapping/>
-  </p:clrMapOvr>
-</p:notes>
-</file>
-
-<file path=ppt/notesSlides/notesSlide12.xml><?xml version="1.0" encoding="utf-8"?>
-<p:notes xmlns:a="http://schemas.openxmlformats.org/drawingml/2006/main" xmlns:r="http://schemas.openxmlformats.org/officeDocument/2006/relationships" xmlns:p="http://schemas.openxmlformats.org/presentationml/2006/main">
-  <p:cSld>
-    <p:spTree>
-      <p:nvGrpSpPr>
-        <p:cNvPr id="1" name=""/>
-        <p:cNvGrpSpPr/>
-        <p:nvPr/>
-      </p:nvGrpSpPr>
-      <p:grpSpPr>
-        <a:xfrm>
-          <a:off x="0" y="0"/>
-          <a:ext cx="0" cy="0"/>
-          <a:chOff x="0" y="0"/>
-          <a:chExt cx="0" cy="0"/>
-        </a:xfrm>
-      </p:grpSpPr>
-      <p:sp>
-        <p:nvSpPr>
-          <p:cNvPr id="2" name="Slide Image Placeholder 1"/>
-          <p:cNvSpPr>
-            <a:spLocks noGrp="1" noRot="1" noChangeAspect="1"/>
-          </p:cNvSpPr>
-          <p:nvPr>
-            <p:ph type="sldImg"/>
-          </p:nvPr>
-        </p:nvSpPr>
-        <p:spPr/>
-      </p:sp>
-      <p:sp>
-        <p:nvSpPr>
-          <p:cNvPr id="3" name="Notes Placeholder 2"/>
-          <p:cNvSpPr>
-            <a:spLocks noGrp="1"/>
-          </p:cNvSpPr>
-          <p:nvPr>
-            <p:ph type="body" idx="1"/>
-          </p:nvPr>
-        </p:nvSpPr>
-        <p:spPr/>
-        <p:txBody>
-          <a:bodyPr/>
-          <a:lstStyle/>
-          <a:p>
-            <a:r>
-              <a:rPr lang="en-US" dirty="0"/>
-              <a:t>RWM: Read the mentor sentence. Discuss as a Reader (what happens?), Writer (what craft did the author use?), then Mimic (write your own).</a:t>
-            </a:r>
-            <a:endParaRPr lang="en-US" dirty="0"/>
-          </a:p>
-        </p:txBody>
-      </p:sp>
-      <p:sp>
-        <p:nvSpPr>
-          <p:cNvPr id="4" name="Slide Number Placeholder 3"/>
-          <p:cNvSpPr>
-            <a:spLocks noGrp="1"/>
-          </p:cNvSpPr>
-          <p:nvPr>
-            <p:ph type="sldNum" sz="quarter" idx="10"/>
-          </p:nvPr>
-        </p:nvSpPr>
-        <p:spPr/>
-        <p:txBody>
-          <a:bodyPr/>
-          <a:lstStyle/>
-          <a:p>
-            <a:fld id="{F7021451-1387-4CA6-816F-3879F97B5CBC}" type="slidenum">
-              <a:rPr lang="en-US"/>
-              <a:t>12</a:t>
-            </a:fld>
-            <a:endParaRPr lang="en-US"/>
-          </a:p>
-        </p:txBody>
-      </p:sp>
-    </p:spTree>
-    <p:extLst>
-      <p:ext uri="{BB962C8B-B14F-4D97-AF65-F5344CB8AC3E}">
-        <p14:creationId xmlns:p14="http://schemas.microsoft.com/office/powerpoint/2010/main" val="1024086991"/>
-      </p:ext>
-    </p:extLst>
-  </p:cSld>
-  <p:clrMapOvr>
-    <a:masterClrMapping/>
-  </p:clrMapOvr>
-</p:notes>
-</file>
-
-<file path=ppt/notesSlides/notesSlide13.xml><?xml version="1.0" encoding="utf-8"?>
-<p:notes xmlns:a="http://schemas.openxmlformats.org/drawingml/2006/main" xmlns:r="http://schemas.openxmlformats.org/officeDocument/2006/relationships" xmlns:p="http://schemas.openxmlformats.org/presentationml/2006/main">
-  <p:cSld>
-    <p:spTree>
-      <p:nvGrpSpPr>
-        <p:cNvPr id="1" name=""/>
-        <p:cNvGrpSpPr/>
-        <p:nvPr/>
-      </p:nvGrpSpPr>
-      <p:grpSpPr>
-        <a:xfrm>
-          <a:off x="0" y="0"/>
-          <a:ext cx="0" cy="0"/>
-          <a:chOff x="0" y="0"/>
-          <a:chExt cx="0" cy="0"/>
-        </a:xfrm>
-      </p:grpSpPr>
-      <p:sp>
-        <p:nvSpPr>
-          <p:cNvPr id="2" name="Slide Image Placeholder 1"/>
-          <p:cNvSpPr>
-            <a:spLocks noGrp="1" noRot="1" noChangeAspect="1"/>
-          </p:cNvSpPr>
-          <p:nvPr>
-            <p:ph type="sldImg"/>
-          </p:nvPr>
-        </p:nvSpPr>
-        <p:spPr/>
-      </p:sp>
-      <p:sp>
-        <p:nvSpPr>
-          <p:cNvPr id="3" name="Notes Placeholder 2"/>
-          <p:cNvSpPr>
-            <a:spLocks noGrp="1"/>
-          </p:cNvSpPr>
-          <p:nvPr>
-            <p:ph type="body" idx="1"/>
-          </p:nvPr>
-        </p:nvSpPr>
-        <p:spPr/>
-        <p:txBody>
-          <a:bodyPr/>
-          <a:lstStyle/>
-          <a:p>
-            <a:r>
-              <a:rPr lang="en-US" dirty="0"/>
-              <a:t>Transition to the writing workshop assignment in Canvas.</a:t>
-            </a:r>
-            <a:endParaRPr lang="en-US" dirty="0"/>
-          </a:p>
-        </p:txBody>
-      </p:sp>
-      <p:sp>
-        <p:nvSpPr>
-          <p:cNvPr id="4" name="Slide Number Placeholder 3"/>
-          <p:cNvSpPr>
-            <a:spLocks noGrp="1"/>
-          </p:cNvSpPr>
-          <p:nvPr>
-            <p:ph type="sldNum" sz="quarter" idx="10"/>
-          </p:nvPr>
-        </p:nvSpPr>
-        <p:spPr/>
-        <p:txBody>
-          <a:bodyPr/>
-          <a:lstStyle/>
-          <a:p>
-            <a:fld id="{F7021451-1387-4CA6-816F-3879F97B5CBC}" type="slidenum">
-              <a:rPr lang="en-US"/>
-              <a:t>13</a:t>
             </a:fld>
             <a:endParaRPr lang="en-US"/>
           </a:p>
@@ -954,7 +776,7 @@
           <a:p>
             <a:r>
               <a:rPr lang="en-US" dirty="0"/>
-              <a:t>Read the prompt aloud once. Give students about 1 minute to read it again silently and think. Remind them: there is no wrong answer — just write what comes to mind. Advance to the writing slide when ready.</a:t>
+              <a:t>Read the prompt aloud. Give students a moment to think before writing.</a:t>
             </a:r>
             <a:endParaRPr lang="en-US" dirty="0"/>
           </a:p>
@@ -1042,7 +864,7 @@
           <a:p>
             <a:r>
               <a:rPr lang="en-US" dirty="0"/>
-              <a:t>Set a 5-minute timer. Walk the room quietly. If a student stops, gently encourage them: "Keep writing — even one more sentence." The goal is sustained writing, not perfection. Do not interrupt to correct spelling or grammar during this time.</a:t>
+              <a:t>Five minutes of sustained writing. Stamina over polish. Do not correct spelling now.</a:t>
             </a:r>
             <a:endParaRPr lang="en-US" dirty="0"/>
           </a:p>
@@ -1130,7 +952,7 @@
           <a:p>
             <a:r>
               <a:rPr lang="en-US" dirty="0"/>
-              <a:t>Set a 1-minute timer. Remind students: we are only fixing ONE thing today — Did I give at least one example or reason?. They should also do a quick conventions check (capitals, punctuation, spelling). They do NOT need to rewrite — just fix and improve. Revision = improving ideas; Editing = fixing conventions. Keep them separate in your language.</a:t>
+              <a:t>One fix only. Editing is conventions; revision is ideas. Name which one you are asking for.</a:t>
             </a:r>
             <a:endParaRPr lang="en-US" dirty="0"/>
           </a:p>
@@ -1218,7 +1040,7 @@
           <a:p>
             <a:r>
               <a:rPr lang="en-US" dirty="0"/>
-              <a:t>Call on 3-5 students to share. Respond with genuine interest: "I love how you described that" or "That's a really interesting idea." Avoid correcting grammar or spelling during share time — this is about celebrating writing. If time is short, have 2-3 students share in chat instead.</a:t>
+              <a:t>Two or three volunteers. Praise something specific in each.</a:t>
             </a:r>
             <a:endParaRPr lang="en-US" dirty="0"/>
           </a:p>
@@ -1306,7 +1128,7 @@
           <a:p>
             <a:r>
               <a:rPr lang="en-US" dirty="0"/>
-              <a:t>Review the big question and reading lens with students before reading.</a:t>
+              <a:t>Reading lens: Good readers in a fantasy story slow down and pay attention to how the author builds the world . Details of setting, character, and pattern all work together to create meaning.</a:t>
             </a:r>
             <a:endParaRPr lang="en-US" dirty="0"/>
           </a:p>
@@ -1394,7 +1216,8 @@
           <a:p>
             <a:r>
               <a:rPr lang="en-US" dirty="0"/>
-              <a:t>Read the model sentence aloud. Ask students: what do you notice about the punctuation and capitalization?</a:t>
+              <a:t>Model sentence in the lesson: Because Mr Tumnus Witch, Lucy.
+Tap through each highlighted word in the lesson and name what it does right before moving to the fix-it.</a:t>
             </a:r>
             <a:endParaRPr lang="en-US" dirty="0"/>
           </a:p>
@@ -1482,7 +1305,8 @@
           <a:p>
             <a:r>
               <a:rPr lang="en-US" dirty="0"/>
-              <a:t>Give students 1-2 minutes to fix the sentence. Walk the room and check.</a:t>
+              <a:t>Corrected: Corrected: Although Lucy was frightened, she kept walking deeper into the wood because she was curious. 
+Look for: Although begins the dependent clause; comma after frightened separates it from the main clause; Lucy is a proper noun (capital); period ends.</a:t>
             </a:r>
             <a:endParaRPr lang="en-US" dirty="0"/>
           </a:p>
@@ -1570,7 +1394,8 @@
           <a:p>
             <a:r>
               <a:rPr lang="en-US" dirty="0"/>
-              <a:t>Reveal the corrected version. Point out each fix: capitalization, punctuation, spelling.</a:t>
+              <a:t>Corrected: Corrected: Although Lucy was frightened, she kept walking deeper into the wood because she was curious. 
+Look for: Although begins the dependent clause; comma after frightened separates it from the main clause; Lucy is a proper noun (capital); period ends.</a:t>
             </a:r>
             <a:endParaRPr lang="en-US" dirty="0"/>
           </a:p>
@@ -1951,8 +1776,8 @@
         </p:nvSpPr>
         <p:spPr>
           <a:xfrm>
-            <a:off x="457200" y="914400"/>
-            <a:ext cx="8229600" cy="1097280"/>
+            <a:off x="0" y="822960"/>
+            <a:ext cx="9144000" cy="822960"/>
           </a:xfrm>
           <a:prstGeom prst="rect">
             <a:avLst/>
@@ -1968,7 +1793,43 @@
               <a:buNone/>
             </a:pPr>
             <a:r>
-              <a:rPr lang="en-US" sz="4000" b="1" dirty="0">
+              <a:rPr lang="en-US" sz="5200" dirty="0">
+                <a:solidFill>
+                  <a:srgbClr val="000000"/>
+                </a:solidFill>
+              </a:rPr>
+              <a:t>🦁</a:t>
+            </a:r>
+            <a:endParaRPr lang="en-US" sz="5200" dirty="0"/>
+          </a:p>
+        </p:txBody>
+      </p:sp>
+      <p:sp>
+        <p:nvSpPr>
+          <p:cNvPr id="3" name="Text 1"/>
+          <p:cNvSpPr/>
+          <p:nvPr/>
+        </p:nvSpPr>
+        <p:spPr>
+          <a:xfrm>
+            <a:off x="457200" y="1691640"/>
+            <a:ext cx="8229600" cy="566928"/>
+          </a:xfrm>
+          <a:prstGeom prst="rect">
+            <a:avLst/>
+          </a:prstGeom>
+          <a:noFill/>
+          <a:ln/>
+        </p:spPr>
+        <p:txBody>
+          <a:bodyPr wrap="square" lIns="0" tIns="0" rIns="0" bIns="0" rtlCol="0" anchor="ctr"/>
+          <a:lstStyle/>
+          <a:p>
+            <a:pPr algn="ctr" indent="0" marL="0">
+              <a:buNone/>
+            </a:pPr>
+            <a:r>
+              <a:rPr lang="en-US" sz="2600" b="1" dirty="0">
                 <a:solidFill>
                   <a:srgbClr val="FFFFFF"/>
                 </a:solidFill>
@@ -1976,22 +1837,22 @@
                 <a:ea typeface="Calibri" pitchFamily="34" charset="-122"/>
                 <a:cs typeface="Calibri" pitchFamily="34" charset="-120"/>
               </a:rPr>
-              <a:t>🦁  Week 25 · Day 4</a:t>
-            </a:r>
-            <a:endParaRPr lang="en-US" sz="4000" dirty="0"/>
-          </a:p>
-        </p:txBody>
-      </p:sp>
-      <p:sp>
-        <p:nvSpPr>
-          <p:cNvPr id="3" name="Text 1"/>
-          <p:cNvSpPr/>
-          <p:nvPr/>
-        </p:nvSpPr>
-        <p:spPr>
-          <a:xfrm>
-            <a:off x="457200" y="2103120"/>
-            <a:ext cx="8229600" cy="731520"/>
+              <a:t>The Lion, the Witch and the Wardrobe</a:t>
+            </a:r>
+            <a:endParaRPr lang="en-US" sz="2600" dirty="0"/>
+          </a:p>
+        </p:txBody>
+      </p:sp>
+      <p:sp>
+        <p:nvSpPr>
+          <p:cNvPr id="4" name="Text 2"/>
+          <p:cNvSpPr/>
+          <p:nvPr/>
+        </p:nvSpPr>
+        <p:spPr>
+          <a:xfrm>
+            <a:off x="457200" y="2331720"/>
+            <a:ext cx="8229600" cy="411480"/>
           </a:xfrm>
           <a:prstGeom prst="rect">
             <a:avLst/>
@@ -2007,7 +1868,7 @@
               <a:buNone/>
             </a:pPr>
             <a:r>
-              <a:rPr lang="en-US" sz="1800" dirty="0">
+              <a:rPr lang="en-US" sz="2000" dirty="0">
                 <a:solidFill>
                   <a:srgbClr val="4A90D9"/>
                 </a:solidFill>
@@ -2015,22 +1876,22 @@
                 <a:ea typeface="Calibri" pitchFamily="34" charset="-122"/>
                 <a:cs typeface="Calibri" pitchFamily="34" charset="-120"/>
               </a:rPr>
-              <a:t>The Lion, the Witch and the Wardrobe — Lesson 25.4</a:t>
-            </a:r>
-            <a:endParaRPr lang="en-US" sz="1800" dirty="0"/>
-          </a:p>
-        </p:txBody>
-      </p:sp>
-      <p:sp>
-        <p:nvSpPr>
-          <p:cNvPr id="4" name="Text 2"/>
-          <p:cNvSpPr/>
-          <p:nvPr/>
-        </p:nvSpPr>
-        <p:spPr>
-          <a:xfrm>
-            <a:off x="457200" y="4114800"/>
-            <a:ext cx="8229600" cy="457200"/>
+              <a:t>Lesson 25.4  ·  Reading: Ch. 1–3</a:t>
+            </a:r>
+            <a:endParaRPr lang="en-US" sz="2000" dirty="0"/>
+          </a:p>
+        </p:txBody>
+      </p:sp>
+      <p:sp>
+        <p:nvSpPr>
+          <p:cNvPr id="5" name="Text 3"/>
+          <p:cNvSpPr/>
+          <p:nvPr/>
+        </p:nvSpPr>
+        <p:spPr>
+          <a:xfrm>
+            <a:off x="457200" y="2880360"/>
+            <a:ext cx="8229600" cy="320040"/>
           </a:xfrm>
           <a:prstGeom prst="rect">
             <a:avLst/>
@@ -2046,17 +1907,17 @@
               <a:buNone/>
             </a:pPr>
             <a:r>
-              <a:rPr lang="en-US" sz="1300" dirty="0">
-                <a:solidFill>
-                  <a:srgbClr val="AAAAAA"/>
-                </a:solidFill>
-                <a:latin typeface="Calibri" pitchFamily="34" charset="0"/>
-                <a:ea typeface="Calibri" pitchFamily="34" charset="-122"/>
-                <a:cs typeface="Calibri" pitchFamily="34" charset="-120"/>
-              </a:rPr>
-              <a:t>Optima Academy Online · 3rd Grade ELA</a:t>
-            </a:r>
-            <a:endParaRPr lang="en-US" sz="1300" dirty="0"/>
+              <a:rPr lang="en-US" sz="1400" dirty="0">
+                <a:solidFill>
+                  <a:srgbClr val="C9BCE4"/>
+                </a:solidFill>
+                <a:latin typeface="Calibri" pitchFamily="34" charset="0"/>
+                <a:ea typeface="Calibri" pitchFamily="34" charset="-122"/>
+                <a:cs typeface="Calibri" pitchFamily="34" charset="-120"/>
+              </a:rPr>
+              <a:t>Grade 3 ELA  ·  Virtue: Loyalty</a:t>
+            </a:r>
+            <a:endParaRPr lang="en-US" sz="1400" dirty="0"/>
           </a:p>
         </p:txBody>
       </p:sp>
@@ -2094,14 +1955,34 @@
       </p:grpSpPr>
       <p:sp>
         <p:nvSpPr>
-          <p:cNvPr id="2" name="Text 0"/>
-          <p:cNvSpPr/>
-          <p:nvPr/>
-        </p:nvSpPr>
-        <p:spPr>
-          <a:xfrm>
-            <a:off x="365760" y="164592"/>
-            <a:ext cx="8412480" cy="566928"/>
+          <p:cNvPr id="2" name="Shape 0"/>
+          <p:cNvSpPr/>
+          <p:nvPr/>
+        </p:nvSpPr>
+        <p:spPr>
+          <a:xfrm>
+            <a:off x="0" y="0"/>
+            <a:ext cx="9144000" cy="566928"/>
+          </a:xfrm>
+          <a:prstGeom prst="rect">
+            <a:avLst/>
+          </a:prstGeom>
+          <a:solidFill>
+            <a:srgbClr val="4A90D9"/>
+          </a:solidFill>
+          <a:ln/>
+        </p:spPr>
+      </p:sp>
+      <p:sp>
+        <p:nvSpPr>
+          <p:cNvPr id="3" name="Text 1"/>
+          <p:cNvSpPr/>
+          <p:nvPr/>
+        </p:nvSpPr>
+        <p:spPr>
+          <a:xfrm>
+            <a:off x="365760" y="54864"/>
+            <a:ext cx="8412480" cy="457200"/>
           </a:xfrm>
           <a:prstGeom prst="rect">
             <a:avLst/>
@@ -2113,46 +1994,23 @@
           <a:bodyPr wrap="square" lIns="0" tIns="0" rIns="0" bIns="0" rtlCol="0" anchor="ctr"/>
           <a:lstStyle/>
           <a:p>
-            <a:pPr algn="l" indent="0" marL="0">
-              <a:buNone/>
-            </a:pPr>
-            <a:r>
-              <a:rPr lang="en-US" sz="2800" b="1" dirty="0">
-                <a:solidFill>
-                  <a:srgbClr val="0E1C42"/>
-                </a:solidFill>
-                <a:latin typeface="Calibri" pitchFamily="34" charset="0"/>
-                <a:ea typeface="Calibri" pitchFamily="34" charset="-122"/>
-                <a:cs typeface="Calibri" pitchFamily="34" charset="-120"/>
-              </a:rPr>
-              <a:t>🌱 Morphology: Prefix inter- means between</a:t>
-            </a:r>
-            <a:endParaRPr lang="en-US" sz="2800" dirty="0"/>
-          </a:p>
-        </p:txBody>
-      </p:sp>
-      <p:sp>
-        <p:nvSpPr>
-          <p:cNvPr id="3" name="Shape 1"/>
-          <p:cNvSpPr/>
-          <p:nvPr/>
-        </p:nvSpPr>
-        <p:spPr>
-          <a:xfrm>
-            <a:off x="365760" y="749808"/>
-            <a:ext cx="8412480" cy="0"/>
-          </a:xfrm>
-          <a:prstGeom prst="line">
-            <a:avLst/>
-          </a:prstGeom>
-          <a:noFill/>
-          <a:ln w="19050">
-            <a:solidFill>
-              <a:srgbClr val="8B6FC0"/>
-            </a:solidFill>
-            <a:prstDash val="solid"/>
-          </a:ln>
-        </p:spPr>
+            <a:pPr indent="0" marL="0">
+              <a:buNone/>
+            </a:pPr>
+            <a:r>
+              <a:rPr lang="en-US" sz="2200" b="1" dirty="0">
+                <a:solidFill>
+                  <a:srgbClr val="FFFFFF"/>
+                </a:solidFill>
+                <a:latin typeface="Calibri" pitchFamily="34" charset="0"/>
+                <a:ea typeface="Calibri" pitchFamily="34" charset="-122"/>
+                <a:cs typeface="Calibri" pitchFamily="34" charset="-120"/>
+              </a:rPr>
+              <a:t>🌱  Morphology</a:t>
+            </a:r>
+            <a:endParaRPr lang="en-US" sz="2200" dirty="0"/>
+          </a:p>
+        </p:txBody>
       </p:sp>
       <p:sp>
         <p:nvSpPr>
@@ -2162,8 +2020,8 @@
         </p:nvSpPr>
         <p:spPr>
           <a:xfrm>
-            <a:off x="457200" y="1005840"/>
-            <a:ext cx="8046720" cy="292608"/>
+            <a:off x="365760" y="804672"/>
+            <a:ext cx="8229600" cy="237744"/>
           </a:xfrm>
           <a:prstGeom prst="rect">
             <a:avLst/>
@@ -2179,15 +2037,15 @@
               <a:buNone/>
             </a:pPr>
             <a:r>
-              <a:rPr lang="en-US" sz="1100" b="1" spc="200" kern="0" dirty="0">
-                <a:solidFill>
-                  <a:srgbClr val="64748B"/>
-                </a:solidFill>
-                <a:latin typeface="Calibri" pitchFamily="34" charset="0"/>
-                <a:ea typeface="Calibri" pitchFamily="34" charset="-122"/>
-                <a:cs typeface="Calibri" pitchFamily="34" charset="-120"/>
-              </a:rPr>
-              <a:t>CONCEPT EXAMPLES</a:t>
+              <a:rPr lang="en-US" sz="1100" b="1" spc="100" kern="0" dirty="0">
+                <a:solidFill>
+                  <a:srgbClr val="8B6FC0"/>
+                </a:solidFill>
+                <a:latin typeface="Calibri" pitchFamily="34" charset="0"/>
+                <a:ea typeface="Calibri" pitchFamily="34" charset="-122"/>
+                <a:cs typeface="Calibri" pitchFamily="34" charset="-120"/>
+              </a:rPr>
+              <a:t>PREFIX INTER- MEANS BETWEEN</a:t>
             </a:r>
             <a:endParaRPr lang="en-US" sz="1100" dirty="0"/>
           </a:p>
@@ -2195,14 +2053,43 @@
       </p:sp>
       <p:sp>
         <p:nvSpPr>
-          <p:cNvPr id="5" name="Text 3"/>
-          <p:cNvSpPr/>
-          <p:nvPr/>
-        </p:nvSpPr>
-        <p:spPr>
-          <a:xfrm>
-            <a:off x="640080" y="1325880"/>
-            <a:ext cx="7863840" cy="320040"/>
+          <p:cNvPr id="5" name="Shape 3"/>
+          <p:cNvSpPr/>
+          <p:nvPr/>
+        </p:nvSpPr>
+        <p:spPr>
+          <a:xfrm>
+            <a:off x="365760" y="1097280"/>
+            <a:ext cx="8412480" cy="621792"/>
+          </a:xfrm>
+          <a:prstGeom prst="roundRect">
+            <a:avLst>
+              <a:gd name="adj" fmla="val 14706"/>
+            </a:avLst>
+          </a:prstGeom>
+          <a:solidFill>
+            <a:srgbClr val="F0E8FF"/>
+          </a:solidFill>
+          <a:ln/>
+          <a:effectLst>
+            <a:outerShdw sx="100000" sy="100000" kx="0" ky="0" algn="bl" rotWithShape="0" blurRad="101600" dist="38100" dir="2700000">
+              <a:srgbClr val="000000">
+                <a:alpha val="12000"/>
+              </a:srgbClr>
+            </a:outerShdw>
+          </a:effectLst>
+        </p:spPr>
+      </p:sp>
+      <p:sp>
+        <p:nvSpPr>
+          <p:cNvPr id="6" name="Text 4"/>
+          <p:cNvSpPr/>
+          <p:nvPr/>
+        </p:nvSpPr>
+        <p:spPr>
+          <a:xfrm>
+            <a:off x="594360" y="1216152"/>
+            <a:ext cx="7863840" cy="384048"/>
           </a:xfrm>
           <a:prstGeom prst="rect">
             <a:avLst/>
@@ -2218,7 +2105,7 @@
               <a:buNone/>
             </a:pPr>
             <a:r>
-              <a:rPr lang="en-US" sz="1300" dirty="0">
+              <a:rPr lang="en-US" sz="1500" dirty="0">
                 <a:solidFill>
                   <a:srgbClr val="1E293B"/>
                 </a:solidFill>
@@ -2226,9 +2113,9 @@
                 <a:ea typeface="Calibri" pitchFamily="34" charset="-122"/>
                 <a:cs typeface="Calibri" pitchFamily="34" charset="-120"/>
               </a:rPr>
-              <a:t>• 📌 Explain: What does inter- mean?</a:t>
-            </a:r>
-            <a:endParaRPr lang="en-US" sz="1300" dirty="0"/>
+              <a:t>🌱  Complete each sentence in your notebook to show you understand the word part.</a:t>
+            </a:r>
+            <a:endParaRPr lang="en-US" sz="1500" dirty="0"/>
           </a:p>
         </p:txBody>
       </p:sp>
@@ -2266,14 +2153,34 @@
       </p:grpSpPr>
       <p:sp>
         <p:nvSpPr>
-          <p:cNvPr id="2" name="Text 0"/>
-          <p:cNvSpPr/>
-          <p:nvPr/>
-        </p:nvSpPr>
-        <p:spPr>
-          <a:xfrm>
-            <a:off x="365760" y="164592"/>
-            <a:ext cx="8412480" cy="566928"/>
+          <p:cNvPr id="2" name="Shape 0"/>
+          <p:cNvSpPr/>
+          <p:nvPr/>
+        </p:nvSpPr>
+        <p:spPr>
+          <a:xfrm>
+            <a:off x="0" y="0"/>
+            <a:ext cx="9144000" cy="566928"/>
+          </a:xfrm>
+          <a:prstGeom prst="rect">
+            <a:avLst/>
+          </a:prstGeom>
+          <a:solidFill>
+            <a:srgbClr val="4A90D9"/>
+          </a:solidFill>
+          <a:ln/>
+        </p:spPr>
+      </p:sp>
+      <p:sp>
+        <p:nvSpPr>
+          <p:cNvPr id="3" name="Text 1"/>
+          <p:cNvSpPr/>
+          <p:nvPr/>
+        </p:nvSpPr>
+        <p:spPr>
+          <a:xfrm>
+            <a:off x="365760" y="54864"/>
+            <a:ext cx="8412480" cy="457200"/>
           </a:xfrm>
           <a:prstGeom prst="rect">
             <a:avLst/>
@@ -2285,11 +2192,50 @@
           <a:bodyPr wrap="square" lIns="0" tIns="0" rIns="0" bIns="0" rtlCol="0" anchor="ctr"/>
           <a:lstStyle/>
           <a:p>
-            <a:pPr algn="l" indent="0" marL="0">
-              <a:buNone/>
-            </a:pPr>
-            <a:r>
-              <a:rPr lang="en-US" sz="2800" b="1" dirty="0">
+            <a:pPr indent="0" marL="0">
+              <a:buNone/>
+            </a:pPr>
+            <a:r>
+              <a:rPr lang="en-US" sz="2200" b="1" dirty="0">
+                <a:solidFill>
+                  <a:srgbClr val="FFFFFF"/>
+                </a:solidFill>
+                <a:latin typeface="Calibri" pitchFamily="34" charset="0"/>
+                <a:ea typeface="Calibri" pitchFamily="34" charset="-122"/>
+                <a:cs typeface="Calibri" pitchFamily="34" charset="-120"/>
+              </a:rPr>
+              <a:t>📕  Read</a:t>
+            </a:r>
+            <a:endParaRPr lang="en-US" sz="2200" dirty="0"/>
+          </a:p>
+        </p:txBody>
+      </p:sp>
+      <p:sp>
+        <p:nvSpPr>
+          <p:cNvPr id="4" name="Text 2"/>
+          <p:cNvSpPr/>
+          <p:nvPr/>
+        </p:nvSpPr>
+        <p:spPr>
+          <a:xfrm>
+            <a:off x="365760" y="868680"/>
+            <a:ext cx="8412480" cy="502920"/>
+          </a:xfrm>
+          <a:prstGeom prst="rect">
+            <a:avLst/>
+          </a:prstGeom>
+          <a:noFill/>
+          <a:ln/>
+        </p:spPr>
+        <p:txBody>
+          <a:bodyPr wrap="square" lIns="0" tIns="0" rIns="0" bIns="0" rtlCol="0" anchor="ctr"/>
+          <a:lstStyle/>
+          <a:p>
+            <a:pPr indent="0" marL="0">
+              <a:buNone/>
+            </a:pPr>
+            <a:r>
+              <a:rPr lang="en-US" sz="2600" b="1" dirty="0">
                 <a:solidFill>
                   <a:srgbClr val="0E1C42"/>
                 </a:solidFill>
@@ -2299,43 +2245,20 @@
               </a:rPr>
               <a:t>Reading: Ch. 1–3</a:t>
             </a:r>
-            <a:endParaRPr lang="en-US" sz="2800" dirty="0"/>
-          </a:p>
-        </p:txBody>
-      </p:sp>
-      <p:sp>
-        <p:nvSpPr>
-          <p:cNvPr id="3" name="Shape 1"/>
-          <p:cNvSpPr/>
-          <p:nvPr/>
-        </p:nvSpPr>
-        <p:spPr>
-          <a:xfrm>
-            <a:off x="365760" y="749808"/>
-            <a:ext cx="8412480" cy="0"/>
-          </a:xfrm>
-          <a:prstGeom prst="line">
-            <a:avLst/>
-          </a:prstGeom>
-          <a:noFill/>
-          <a:ln w="19050">
-            <a:solidFill>
-              <a:srgbClr val="55C8E8"/>
-            </a:solidFill>
-            <a:prstDash val="solid"/>
-          </a:ln>
-        </p:spPr>
-      </p:sp>
-      <p:sp>
-        <p:nvSpPr>
-          <p:cNvPr id="4" name="Text 2"/>
-          <p:cNvSpPr/>
-          <p:nvPr/>
-        </p:nvSpPr>
-        <p:spPr>
-          <a:xfrm>
-            <a:off x="457200" y="1005840"/>
-            <a:ext cx="8046720" cy="292608"/>
+            <a:endParaRPr lang="en-US" sz="2600" dirty="0"/>
+          </a:p>
+        </p:txBody>
+      </p:sp>
+      <p:sp>
+        <p:nvSpPr>
+          <p:cNvPr id="5" name="Text 3"/>
+          <p:cNvSpPr/>
+          <p:nvPr/>
+        </p:nvSpPr>
+        <p:spPr>
+          <a:xfrm>
+            <a:off x="365760" y="1463040"/>
+            <a:ext cx="8229600" cy="237744"/>
           </a:xfrm>
           <a:prstGeom prst="rect">
             <a:avLst/>
@@ -2351,9 +2274,9 @@
               <a:buNone/>
             </a:pPr>
             <a:r>
-              <a:rPr lang="en-US" sz="1100" b="1" spc="200" kern="0" dirty="0">
-                <a:solidFill>
-                  <a:srgbClr val="55C8E8"/>
+              <a:rPr lang="en-US" sz="1100" b="1" spc="100" kern="0" dirty="0">
+                <a:solidFill>
+                  <a:srgbClr val="C7922C"/>
                 </a:solidFill>
                 <a:latin typeface="Calibri" pitchFamily="34" charset="0"/>
                 <a:ea typeface="Calibri" pitchFamily="34" charset="-122"/>
@@ -2367,14 +2290,14 @@
       </p:sp>
       <p:sp>
         <p:nvSpPr>
-          <p:cNvPr id="5" name="Text 3"/>
-          <p:cNvSpPr/>
-          <p:nvPr/>
-        </p:nvSpPr>
-        <p:spPr>
-          <a:xfrm>
-            <a:off x="640080" y="1325880"/>
-            <a:ext cx="7863840" cy="548640"/>
+          <p:cNvPr id="6" name="Text 4"/>
+          <p:cNvSpPr/>
+          <p:nvPr/>
+        </p:nvSpPr>
+        <p:spPr>
+          <a:xfrm>
+            <a:off x="365760" y="1719072"/>
+            <a:ext cx="8412480" cy="914400"/>
           </a:xfrm>
           <a:prstGeom prst="rect">
             <a:avLst/>
@@ -2390,7 +2313,7 @@
               <a:buNone/>
             </a:pPr>
             <a:r>
-              <a:rPr lang="en-US" sz="1400" i="1" dirty="0">
+              <a:rPr lang="en-US" sz="1500" dirty="0">
                 <a:solidFill>
                   <a:srgbClr val="1E293B"/>
                 </a:solidFill>
@@ -2398,38 +2321,16 @@
                 <a:ea typeface="Calibri" pitchFamily="34" charset="-122"/>
                 <a:cs typeface="Calibri" pitchFamily="34" charset="-120"/>
               </a:rPr>
-              <a:t>As you read today, ask yourself: What makes a reader believe in a fantasy world an author has invented?</a:t>
-            </a:r>
-            <a:endParaRPr lang="en-US" sz="1400" dirty="0"/>
-          </a:p>
-        </p:txBody>
-      </p:sp>
-      <p:sp>
-        <p:nvSpPr>
-          <p:cNvPr id="6" name="Text 4"/>
-          <p:cNvSpPr/>
-          <p:nvPr/>
-        </p:nvSpPr>
-        <p:spPr>
-          <a:xfrm>
-            <a:off x="640080" y="1965960"/>
-            <a:ext cx="7863840" cy="548640"/>
-          </a:xfrm>
-          <a:prstGeom prst="rect">
-            <a:avLst/>
-          </a:prstGeom>
-          <a:noFill/>
-          <a:ln/>
-        </p:spPr>
-        <p:txBody>
-          <a:bodyPr wrap="square" lIns="0" tIns="0" rIns="0" bIns="0" rtlCol="0" anchor="ctr"/>
-          <a:lstStyle/>
-          <a:p>
-            <a:pPr indent="0" marL="0">
-              <a:buNone/>
-            </a:pPr>
-            <a:r>
-              <a:rPr lang="en-US" sz="1400" i="1" dirty="0">
+              <a:t>•  Orient yourself in fantasy settings.</a:t>
+            </a:r>
+            <a:endParaRPr lang="en-US" sz="1500" dirty="0"/>
+          </a:p>
+          <a:p>
+            <a:pPr indent="0" marL="0">
+              <a:buNone/>
+            </a:pPr>
+            <a:r>
+              <a:rPr lang="en-US" sz="1500" dirty="0">
                 <a:solidFill>
                   <a:srgbClr val="1E293B"/>
                 </a:solidFill>
@@ -2437,166 +2338,16 @@
                 <a:ea typeface="Calibri" pitchFamily="34" charset="-122"/>
                 <a:cs typeface="Calibri" pitchFamily="34" charset="-120"/>
               </a:rPr>
-              <a:t>Complete this sentence: C.S. Lewis makes Narnia feel real by ___. Include at least one detail from the book.</a:t>
-            </a:r>
-            <a:endParaRPr lang="en-US" sz="1400" dirty="0"/>
-          </a:p>
-        </p:txBody>
-      </p:sp>
-    </p:spTree>
-  </p:cSld>
-  <p:clrMapOvr>
-    <a:masterClrMapping/>
-  </p:clrMapOvr>
-</p:sld>
-</file>
-
-<file path=ppt/slides/slide12.xml><?xml version="1.0" encoding="utf-8"?>
-<p:sld xmlns:a="http://schemas.openxmlformats.org/drawingml/2006/main" xmlns:r="http://schemas.openxmlformats.org/officeDocument/2006/relationships" xmlns:p="http://schemas.openxmlformats.org/presentationml/2006/main">
-  <p:cSld name="Slide 12">
-    <p:bg>
-      <p:bgPr>
-        <a:solidFill>
-          <a:srgbClr val="FFFFFF"/>
-        </a:solidFill>
-      </p:bgPr>
-    </p:bg>
-    <p:spTree>
-      <p:nvGrpSpPr>
-        <p:cNvPr id="1" name=""/>
-        <p:cNvGrpSpPr/>
-        <p:nvPr/>
-      </p:nvGrpSpPr>
-      <p:grpSpPr>
-        <a:xfrm>
-          <a:off x="0" y="0"/>
-          <a:ext cx="0" cy="0"/>
-          <a:chOff x="0" y="0"/>
-          <a:chExt cx="0" cy="0"/>
-        </a:xfrm>
-      </p:grpSpPr>
-      <p:sp>
-        <p:nvSpPr>
-          <p:cNvPr id="2" name="Text 0"/>
-          <p:cNvSpPr/>
-          <p:nvPr/>
-        </p:nvSpPr>
-        <p:spPr>
-          <a:xfrm>
-            <a:off x="365760" y="164592"/>
-            <a:ext cx="8412480" cy="566928"/>
-          </a:xfrm>
-          <a:prstGeom prst="rect">
-            <a:avLst/>
-          </a:prstGeom>
-          <a:noFill/>
-          <a:ln/>
-        </p:spPr>
-        <p:txBody>
-          <a:bodyPr wrap="square" lIns="0" tIns="0" rIns="0" bIns="0" rtlCol="0" anchor="ctr"/>
-          <a:lstStyle/>
-          <a:p>
-            <a:pPr algn="l" indent="0" marL="0">
-              <a:buNone/>
-            </a:pPr>
-            <a:r>
-              <a:rPr lang="en-US" sz="2800" b="1" dirty="0">
-                <a:solidFill>
-                  <a:srgbClr val="0E1C42"/>
-                </a:solidFill>
-                <a:latin typeface="Calibri" pitchFamily="34" charset="0"/>
-                <a:ea typeface="Calibri" pitchFamily="34" charset="-122"/>
-                <a:cs typeface="Calibri" pitchFamily="34" charset="-120"/>
-              </a:rPr>
-              <a:t>📖 Read · Write · Mimic</a:t>
-            </a:r>
-            <a:endParaRPr lang="en-US" sz="2800" dirty="0"/>
-          </a:p>
-        </p:txBody>
-      </p:sp>
-      <p:sp>
-        <p:nvSpPr>
-          <p:cNvPr id="3" name="Shape 1"/>
-          <p:cNvSpPr/>
-          <p:nvPr/>
-        </p:nvSpPr>
-        <p:spPr>
-          <a:xfrm>
-            <a:off x="365760" y="749808"/>
-            <a:ext cx="8412480" cy="0"/>
-          </a:xfrm>
-          <a:prstGeom prst="line">
-            <a:avLst/>
-          </a:prstGeom>
-          <a:noFill/>
-          <a:ln w="19050">
-            <a:solidFill>
-              <a:srgbClr val="C7922C"/>
-            </a:solidFill>
-            <a:prstDash val="solid"/>
-          </a:ln>
-        </p:spPr>
-      </p:sp>
-      <p:sp>
-        <p:nvSpPr>
-          <p:cNvPr id="4" name="Shape 2"/>
-          <p:cNvSpPr/>
-          <p:nvPr/>
-        </p:nvSpPr>
-        <p:spPr>
-          <a:xfrm>
-            <a:off x="457200" y="914400"/>
-            <a:ext cx="8229600" cy="640080"/>
-          </a:xfrm>
-          <a:prstGeom prst="roundRect">
-            <a:avLst>
-              <a:gd name="adj" fmla="val 14286"/>
-            </a:avLst>
-          </a:prstGeom>
-          <a:solidFill>
-            <a:srgbClr val="FEF6E8"/>
-          </a:solidFill>
-          <a:ln w="12700">
-            <a:solidFill>
-              <a:srgbClr val="C7922C"/>
-            </a:solidFill>
-            <a:prstDash val="solid"/>
-          </a:ln>
-          <a:effectLst>
-            <a:outerShdw sx="100000" sy="100000" kx="0" ky="0" algn="bl" rotWithShape="0" blurRad="101600" dist="38100" dir="2700000">
-              <a:srgbClr val="000000">
-                <a:alpha val="12000"/>
-              </a:srgbClr>
-            </a:outerShdw>
-          </a:effectLst>
-        </p:spPr>
-      </p:sp>
-      <p:sp>
-        <p:nvSpPr>
-          <p:cNvPr id="5" name="Text 3"/>
-          <p:cNvSpPr/>
-          <p:nvPr/>
-        </p:nvSpPr>
-        <p:spPr>
-          <a:xfrm>
-            <a:off x="640080" y="1024128"/>
-            <a:ext cx="7863840" cy="411480"/>
-          </a:xfrm>
-          <a:prstGeom prst="rect">
-            <a:avLst/>
-          </a:prstGeom>
-          <a:noFill/>
-          <a:ln/>
-        </p:spPr>
-        <p:txBody>
-          <a:bodyPr wrap="square" lIns="0" tIns="0" rIns="0" bIns="0" rtlCol="0" anchor="ctr"/>
-          <a:lstStyle/>
-          <a:p>
-            <a:pPr indent="0" marL="0">
-              <a:buNone/>
-            </a:pPr>
-            <a:r>
-              <a:rPr lang="en-US" sz="1800" i="1" dirty="0">
+              <a:t>•  As you read today, ask yourself: What makes a reader believe in a fantasy world an author has invented?</a:t>
+            </a:r>
+            <a:endParaRPr lang="en-US" sz="1500" dirty="0"/>
+          </a:p>
+          <a:p>
+            <a:pPr indent="0" marL="0">
+              <a:buNone/>
+            </a:pPr>
+            <a:r>
+              <a:rPr lang="en-US" sz="1500" dirty="0">
                 <a:solidFill>
                   <a:srgbClr val="1E293B"/>
                 </a:solidFill>
@@ -2604,484 +2355,9 @@
                 <a:ea typeface="Calibri" pitchFamily="34" charset="-122"/>
                 <a:cs typeface="Calibri" pitchFamily="34" charset="-120"/>
               </a:rPr>
-              <a:t>“And then she saw that there was a light ahead of her; not a few inches away where the back of the wardrobe ought to have been, but a long way off.”</a:t>
-            </a:r>
-            <a:endParaRPr lang="en-US" sz="1800" dirty="0"/>
-          </a:p>
-        </p:txBody>
-      </p:sp>
-      <p:sp>
-        <p:nvSpPr>
-          <p:cNvPr id="6" name="Text 4"/>
-          <p:cNvSpPr/>
-          <p:nvPr/>
-        </p:nvSpPr>
-        <p:spPr>
-          <a:xfrm>
-            <a:off x="640080" y="1645920"/>
-            <a:ext cx="7863840" cy="320040"/>
-          </a:xfrm>
-          <a:prstGeom prst="rect">
-            <a:avLst/>
-          </a:prstGeom>
-          <a:noFill/>
-          <a:ln/>
-        </p:spPr>
-        <p:txBody>
-          <a:bodyPr wrap="square" lIns="0" tIns="0" rIns="0" bIns="0" rtlCol="0" anchor="ctr"/>
-          <a:lstStyle/>
-          <a:p>
-            <a:pPr indent="0" marL="0">
-              <a:buNone/>
-            </a:pPr>
-            <a:r>
-              <a:rPr lang="en-US" sz="1300" i="1" dirty="0">
-                <a:solidFill>
-                  <a:srgbClr val="8B6FC0"/>
-                </a:solidFill>
-                <a:latin typeface="Calibri" pitchFamily="34" charset="0"/>
-                <a:ea typeface="Calibri" pitchFamily="34" charset="-122"/>
-                <a:cs typeface="Calibri" pitchFamily="34" charset="-120"/>
-              </a:rPr>
-              <a:t>📌 Craft focus: contrast using but — expected vs. actual</a:t>
-            </a:r>
-            <a:endParaRPr lang="en-US" sz="1300" dirty="0"/>
-          </a:p>
-        </p:txBody>
-      </p:sp>
-      <p:sp>
-        <p:nvSpPr>
-          <p:cNvPr id="7" name="Shape 5"/>
-          <p:cNvSpPr/>
-          <p:nvPr/>
-        </p:nvSpPr>
-        <p:spPr>
-          <a:xfrm>
-            <a:off x="457200" y="2057400"/>
-            <a:ext cx="8229600" cy="594360"/>
-          </a:xfrm>
-          <a:prstGeom prst="roundRect">
-            <a:avLst>
-              <a:gd name="adj" fmla="val 15385"/>
-            </a:avLst>
-          </a:prstGeom>
-          <a:solidFill>
-            <a:srgbClr val="E5F7FC"/>
-          </a:solidFill>
-          <a:ln/>
-          <a:effectLst>
-            <a:outerShdw sx="100000" sy="100000" kx="0" ky="0" algn="bl" rotWithShape="0" blurRad="101600" dist="38100" dir="2700000">
-              <a:srgbClr val="000000">
-                <a:alpha val="12000"/>
-              </a:srgbClr>
-            </a:outerShdw>
-          </a:effectLst>
-        </p:spPr>
-      </p:sp>
-      <p:sp>
-        <p:nvSpPr>
-          <p:cNvPr id="8" name="Text 6"/>
-          <p:cNvSpPr/>
-          <p:nvPr/>
-        </p:nvSpPr>
-        <p:spPr>
-          <a:xfrm>
-            <a:off x="640080" y="2103120"/>
-            <a:ext cx="7863840" cy="502920"/>
-          </a:xfrm>
-          <a:prstGeom prst="rect">
-            <a:avLst/>
-          </a:prstGeom>
-          <a:noFill/>
-          <a:ln/>
-        </p:spPr>
-        <p:txBody>
-          <a:bodyPr wrap="square" lIns="0" tIns="0" rIns="0" bIns="0" rtlCol="0" anchor="t"/>
-          <a:lstStyle/>
-          <a:p>
-            <a:pPr indent="0" marL="0">
-              <a:buNone/>
-            </a:pPr>
-            <a:r>
-              <a:rPr lang="en-US" sz="1400" b="1" dirty="0">
-                <a:solidFill>
-                  <a:srgbClr val="0E1C42"/>
-                </a:solidFill>
-                <a:latin typeface="Calibri" pitchFamily="34" charset="0"/>
-                <a:ea typeface="Calibri" pitchFamily="34" charset="-122"/>
-                <a:cs typeface="Calibri" pitchFamily="34" charset="-120"/>
-              </a:rPr>
-              <a:t>📖 📖 Read like a Reader</a:t>
-            </a:r>
-            <a:pPr indent="0" marL="0">
-              <a:buNone/>
-            </a:pPr>
-            <a:endParaRPr lang="en-US" sz="1400" dirty="0"/>
-          </a:p>
-          <a:p>
-            <a:pPr indent="0" marL="0">
-              <a:buNone/>
-            </a:pPr>
-            <a:r>
-              <a:rPr lang="en-US" sz="1200" dirty="0">
-                <a:solidFill>
-                  <a:srgbClr val="1E293B"/>
-                </a:solidFill>
-                <a:latin typeface="Calibri" pitchFamily="34" charset="0"/>
-                <a:ea typeface="Calibri" pitchFamily="34" charset="-122"/>
-                <a:cs typeface="Calibri" pitchFamily="34" charset="-120"/>
-              </a:rPr>
-              <a:t>Lucy expects the wardrobe to end. Instead, there's light far ahead. What moment in your own life surprised you the way this surprised Lucy? What does it feel like when a place turns out to be bigger than expected?</a:t>
-            </a:r>
-            <a:endParaRPr lang="en-US" sz="1400" dirty="0"/>
-          </a:p>
-        </p:txBody>
-      </p:sp>
-      <p:sp>
-        <p:nvSpPr>
-          <p:cNvPr id="9" name="Shape 7"/>
-          <p:cNvSpPr/>
-          <p:nvPr/>
-        </p:nvSpPr>
-        <p:spPr>
-          <a:xfrm>
-            <a:off x="457200" y="2715768"/>
-            <a:ext cx="8229600" cy="594360"/>
-          </a:xfrm>
-          <a:prstGeom prst="roundRect">
-            <a:avLst>
-              <a:gd name="adj" fmla="val 15385"/>
-            </a:avLst>
-          </a:prstGeom>
-          <a:solidFill>
-            <a:srgbClr val="F0E8FF"/>
-          </a:solidFill>
-          <a:ln/>
-          <a:effectLst>
-            <a:outerShdw sx="100000" sy="100000" kx="0" ky="0" algn="bl" rotWithShape="0" blurRad="101600" dist="38100" dir="2700000">
-              <a:srgbClr val="000000">
-                <a:alpha val="12000"/>
-              </a:srgbClr>
-            </a:outerShdw>
-          </a:effectLst>
-        </p:spPr>
-      </p:sp>
-      <p:sp>
-        <p:nvSpPr>
-          <p:cNvPr id="10" name="Text 8"/>
-          <p:cNvSpPr/>
-          <p:nvPr/>
-        </p:nvSpPr>
-        <p:spPr>
-          <a:xfrm>
-            <a:off x="640080" y="2761488"/>
-            <a:ext cx="7863840" cy="502920"/>
-          </a:xfrm>
-          <a:prstGeom prst="rect">
-            <a:avLst/>
-          </a:prstGeom>
-          <a:noFill/>
-          <a:ln/>
-        </p:spPr>
-        <p:txBody>
-          <a:bodyPr wrap="square" lIns="0" tIns="0" rIns="0" bIns="0" rtlCol="0" anchor="t"/>
-          <a:lstStyle/>
-          <a:p>
-            <a:pPr indent="0" marL="0">
-              <a:buNone/>
-            </a:pPr>
-            <a:r>
-              <a:rPr lang="en-US" sz="1400" b="1" dirty="0">
-                <a:solidFill>
-                  <a:srgbClr val="0E1C42"/>
-                </a:solidFill>
-                <a:latin typeface="Calibri" pitchFamily="34" charset="0"/>
-                <a:ea typeface="Calibri" pitchFamily="34" charset="-122"/>
-                <a:cs typeface="Calibri" pitchFamily="34" charset="-120"/>
-              </a:rPr>
-              <a:t>✏️ ✏️ Read like a Writer</a:t>
-            </a:r>
-            <a:pPr indent="0" marL="0">
-              <a:buNone/>
-            </a:pPr>
-            <a:endParaRPr lang="en-US" sz="1400" dirty="0"/>
-          </a:p>
-          <a:p>
-            <a:pPr indent="0" marL="0">
-              <a:buNone/>
-            </a:pPr>
-            <a:r>
-              <a:rPr lang="en-US" sz="1200" dirty="0">
-                <a:solidFill>
-                  <a:srgbClr val="1E293B"/>
-                </a:solidFill>
-                <a:latin typeface="Calibri" pitchFamily="34" charset="0"/>
-                <a:ea typeface="Calibri" pitchFamily="34" charset="-122"/>
-                <a:cs typeface="Calibri" pitchFamily="34" charset="-120"/>
-              </a:rPr>
-              <a:t>Lewis tells us what Lucy expected to see ( "not a few inches away where the back ought to have been" ) before telling us what she actually saw. Why include what wasn't there? How does telling us the expected thing make the surprising thing even bigger?</a:t>
-            </a:r>
-            <a:endParaRPr lang="en-US" sz="1400" dirty="0"/>
-          </a:p>
-        </p:txBody>
-      </p:sp>
-      <p:sp>
-        <p:nvSpPr>
-          <p:cNvPr id="11" name="Shape 9"/>
-          <p:cNvSpPr/>
-          <p:nvPr/>
-        </p:nvSpPr>
-        <p:spPr>
-          <a:xfrm>
-            <a:off x="457200" y="3374136"/>
-            <a:ext cx="8229600" cy="594360"/>
-          </a:xfrm>
-          <a:prstGeom prst="roundRect">
-            <a:avLst>
-              <a:gd name="adj" fmla="val 15385"/>
-            </a:avLst>
-          </a:prstGeom>
-          <a:solidFill>
-            <a:srgbClr val="E8F8EF"/>
-          </a:solidFill>
-          <a:ln/>
-          <a:effectLst>
-            <a:outerShdw sx="100000" sy="100000" kx="0" ky="0" algn="bl" rotWithShape="0" blurRad="101600" dist="38100" dir="2700000">
-              <a:srgbClr val="000000">
-                <a:alpha val="12000"/>
-              </a:srgbClr>
-            </a:outerShdw>
-          </a:effectLst>
-        </p:spPr>
-      </p:sp>
-      <p:sp>
-        <p:nvSpPr>
-          <p:cNvPr id="12" name="Text 10"/>
-          <p:cNvSpPr/>
-          <p:nvPr/>
-        </p:nvSpPr>
-        <p:spPr>
-          <a:xfrm>
-            <a:off x="640080" y="3419856"/>
-            <a:ext cx="7863840" cy="502920"/>
-          </a:xfrm>
-          <a:prstGeom prst="rect">
-            <a:avLst/>
-          </a:prstGeom>
-          <a:noFill/>
-          <a:ln/>
-        </p:spPr>
-        <p:txBody>
-          <a:bodyPr wrap="square" lIns="0" tIns="0" rIns="0" bIns="0" rtlCol="0" anchor="t"/>
-          <a:lstStyle/>
-          <a:p>
-            <a:pPr indent="0" marL="0">
-              <a:buNone/>
-            </a:pPr>
-            <a:r>
-              <a:rPr lang="en-US" sz="1400" b="1" dirty="0">
-                <a:solidFill>
-                  <a:srgbClr val="0E1C42"/>
-                </a:solidFill>
-                <a:latin typeface="Calibri" pitchFamily="34" charset="0"/>
-                <a:ea typeface="Calibri" pitchFamily="34" charset="-122"/>
-                <a:cs typeface="Calibri" pitchFamily="34" charset="-120"/>
-              </a:rPr>
-              <a:t>🖊️ 🖊️ Mimic</a:t>
-            </a:r>
-            <a:pPr indent="0" marL="0">
-              <a:buNone/>
-            </a:pPr>
-            <a:endParaRPr lang="en-US" sz="1400" dirty="0"/>
-          </a:p>
-          <a:p>
-            <a:pPr indent="0" marL="0">
-              <a:buNone/>
-            </a:pPr>
-            <a:r>
-              <a:rPr lang="en-US" sz="1200" dirty="0">
-                <a:solidFill>
-                  <a:srgbClr val="1E293B"/>
-                </a:solidFill>
-                <a:latin typeface="Calibri" pitchFamily="34" charset="0"/>
-                <a:ea typeface="Calibri" pitchFamily="34" charset="-122"/>
-                <a:cs typeface="Calibri" pitchFamily="34" charset="-120"/>
-              </a:rPr>
-              <a:t>Write your own sentence using the same pattern as the author.</a:t>
-            </a:r>
-            <a:endParaRPr lang="en-US" sz="1400" dirty="0"/>
-          </a:p>
-        </p:txBody>
-      </p:sp>
-    </p:spTree>
-  </p:cSld>
-  <p:clrMapOvr>
-    <a:masterClrMapping/>
-  </p:clrMapOvr>
-</p:sld>
-</file>
-
-<file path=ppt/slides/slide13.xml><?xml version="1.0" encoding="utf-8"?>
-<p:sld xmlns:a="http://schemas.openxmlformats.org/drawingml/2006/main" xmlns:r="http://schemas.openxmlformats.org/officeDocument/2006/relationships" xmlns:p="http://schemas.openxmlformats.org/presentationml/2006/main">
-  <p:cSld name="Slide 13">
-    <p:bg>
-      <p:bgPr>
-        <a:solidFill>
-          <a:srgbClr val="FFFFFF"/>
-        </a:solidFill>
-      </p:bgPr>
-    </p:bg>
-    <p:spTree>
-      <p:nvGrpSpPr>
-        <p:cNvPr id="1" name=""/>
-        <p:cNvGrpSpPr/>
-        <p:nvPr/>
-      </p:nvGrpSpPr>
-      <p:grpSpPr>
-        <a:xfrm>
-          <a:off x="0" y="0"/>
-          <a:ext cx="0" cy="0"/>
-          <a:chOff x="0" y="0"/>
-          <a:chExt cx="0" cy="0"/>
-        </a:xfrm>
-      </p:grpSpPr>
-      <p:sp>
-        <p:nvSpPr>
-          <p:cNvPr id="2" name="Text 0"/>
-          <p:cNvSpPr/>
-          <p:nvPr/>
-        </p:nvSpPr>
-        <p:spPr>
-          <a:xfrm>
-            <a:off x="365760" y="164592"/>
-            <a:ext cx="8412480" cy="566928"/>
-          </a:xfrm>
-          <a:prstGeom prst="rect">
-            <a:avLst/>
-          </a:prstGeom>
-          <a:noFill/>
-          <a:ln/>
-        </p:spPr>
-        <p:txBody>
-          <a:bodyPr wrap="square" lIns="0" tIns="0" rIns="0" bIns="0" rtlCol="0" anchor="ctr"/>
-          <a:lstStyle/>
-          <a:p>
-            <a:pPr algn="l" indent="0" marL="0">
-              <a:buNone/>
-            </a:pPr>
-            <a:r>
-              <a:rPr lang="en-US" sz="2800" b="1" dirty="0">
-                <a:solidFill>
-                  <a:srgbClr val="0E1C42"/>
-                </a:solidFill>
-                <a:latin typeface="Calibri" pitchFamily="34" charset="0"/>
-                <a:ea typeface="Calibri" pitchFamily="34" charset="-122"/>
-                <a:cs typeface="Calibri" pitchFamily="34" charset="-120"/>
-              </a:rPr>
-              <a:t>Writer’s Workshop: Week 25 · CLOSING Sentence</a:t>
-            </a:r>
-            <a:endParaRPr lang="en-US" sz="2800" dirty="0"/>
-          </a:p>
-        </p:txBody>
-      </p:sp>
-      <p:sp>
-        <p:nvSpPr>
-          <p:cNvPr id="3" name="Shape 1"/>
-          <p:cNvSpPr/>
-          <p:nvPr/>
-        </p:nvSpPr>
-        <p:spPr>
-          <a:xfrm>
-            <a:off x="365760" y="749808"/>
-            <a:ext cx="8412480" cy="0"/>
-          </a:xfrm>
-          <a:prstGeom prst="line">
-            <a:avLst/>
-          </a:prstGeom>
-          <a:noFill/>
-          <a:ln w="19050">
-            <a:solidFill>
-              <a:srgbClr val="34B76F"/>
-            </a:solidFill>
-            <a:prstDash val="solid"/>
-          </a:ln>
-        </p:spPr>
-      </p:sp>
-      <p:sp>
-        <p:nvSpPr>
-          <p:cNvPr id="4" name="Text 2"/>
-          <p:cNvSpPr/>
-          <p:nvPr/>
-        </p:nvSpPr>
-        <p:spPr>
-          <a:xfrm>
-            <a:off x="640080" y="1371600"/>
-            <a:ext cx="7863840" cy="457200"/>
-          </a:xfrm>
-          <a:prstGeom prst="rect">
-            <a:avLst/>
-          </a:prstGeom>
-          <a:noFill/>
-          <a:ln/>
-        </p:spPr>
-        <p:txBody>
-          <a:bodyPr wrap="square" lIns="0" tIns="0" rIns="0" bIns="0" rtlCol="0" anchor="ctr"/>
-          <a:lstStyle/>
-          <a:p>
-            <a:pPr indent="0" marL="0">
-              <a:buNone/>
-            </a:pPr>
-            <a:r>
-              <a:rPr lang="en-US" sz="1600" dirty="0">
-                <a:solidFill>
-                  <a:srgbClr val="1E293B"/>
-                </a:solidFill>
-                <a:latin typeface="Calibri" pitchFamily="34" charset="0"/>
-                <a:ea typeface="Calibri" pitchFamily="34" charset="-122"/>
-                <a:cs typeface="Calibri" pitchFamily="34" charset="-120"/>
-              </a:rPr>
-              <a:t>Open your writing assignment in Canvas.</a:t>
-            </a:r>
-            <a:endParaRPr lang="en-US" sz="1600" dirty="0"/>
-          </a:p>
-        </p:txBody>
-      </p:sp>
-      <p:sp>
-        <p:nvSpPr>
-          <p:cNvPr id="5" name="Text 3"/>
-          <p:cNvSpPr/>
-          <p:nvPr/>
-        </p:nvSpPr>
-        <p:spPr>
-          <a:xfrm>
-            <a:off x="640080" y="2011680"/>
-            <a:ext cx="7863840" cy="457200"/>
-          </a:xfrm>
-          <a:prstGeom prst="rect">
-            <a:avLst/>
-          </a:prstGeom>
-          <a:noFill/>
-          <a:ln/>
-        </p:spPr>
-        <p:txBody>
-          <a:bodyPr wrap="square" lIns="0" tIns="0" rIns="0" bIns="0" rtlCol="0" anchor="ctr"/>
-          <a:lstStyle/>
-          <a:p>
-            <a:pPr indent="0" marL="0">
-              <a:buNone/>
-            </a:pPr>
-            <a:r>
-              <a:rPr lang="en-US" sz="1400" dirty="0">
-                <a:solidFill>
-                  <a:srgbClr val="64748B"/>
-                </a:solidFill>
-                <a:latin typeface="Calibri" pitchFamily="34" charset="0"/>
-                <a:ea typeface="Calibri" pitchFamily="34" charset="-122"/>
-                <a:cs typeface="Calibri" pitchFamily="34" charset="-120"/>
-              </a:rPr>
-              <a:t>Follow the writing prompt for today's workshop.</a:t>
-            </a:r>
-            <a:endParaRPr lang="en-US" sz="1400" dirty="0"/>
+              <a:t>•  In the chapters you are reading, find one thing that is not a person but behaves like one. Copy the sentence and underline what gives it away.</a:t>
+            </a:r>
+            <a:endParaRPr lang="en-US" sz="1500" dirty="0"/>
           </a:p>
         </p:txBody>
       </p:sp>
@@ -3119,14 +2395,34 @@
       </p:grpSpPr>
       <p:sp>
         <p:nvSpPr>
-          <p:cNvPr id="2" name="Text 0"/>
-          <p:cNvSpPr/>
-          <p:nvPr/>
-        </p:nvSpPr>
-        <p:spPr>
-          <a:xfrm>
-            <a:off x="365760" y="164592"/>
-            <a:ext cx="8412480" cy="566928"/>
+          <p:cNvPr id="2" name="Shape 0"/>
+          <p:cNvSpPr/>
+          <p:nvPr/>
+        </p:nvSpPr>
+        <p:spPr>
+          <a:xfrm>
+            <a:off x="0" y="0"/>
+            <a:ext cx="9144000" cy="566928"/>
+          </a:xfrm>
+          <a:prstGeom prst="rect">
+            <a:avLst/>
+          </a:prstGeom>
+          <a:solidFill>
+            <a:srgbClr val="C7922C"/>
+          </a:solidFill>
+          <a:ln/>
+        </p:spPr>
+      </p:sp>
+      <p:sp>
+        <p:nvSpPr>
+          <p:cNvPr id="3" name="Text 1"/>
+          <p:cNvSpPr/>
+          <p:nvPr/>
+        </p:nvSpPr>
+        <p:spPr>
+          <a:xfrm>
+            <a:off x="365760" y="54864"/>
+            <a:ext cx="8412480" cy="457200"/>
           </a:xfrm>
           <a:prstGeom prst="rect">
             <a:avLst/>
@@ -3138,46 +2434,23 @@
           <a:bodyPr wrap="square" lIns="0" tIns="0" rIns="0" bIns="0" rtlCol="0" anchor="ctr"/>
           <a:lstStyle/>
           <a:p>
-            <a:pPr algn="l" indent="0" marL="0">
-              <a:buNone/>
-            </a:pPr>
-            <a:r>
-              <a:rPr lang="en-US" sz="2800" b="1" dirty="0">
-                <a:solidFill>
-                  <a:srgbClr val="0E1C42"/>
-                </a:solidFill>
-                <a:latin typeface="Calibri" pitchFamily="34" charset="0"/>
-                <a:ea typeface="Calibri" pitchFamily="34" charset="-122"/>
-                <a:cs typeface="Calibri" pitchFamily="34" charset="-120"/>
-              </a:rPr>
-              <a:t>✏️ 10-Minute Write</a:t>
-            </a:r>
-            <a:endParaRPr lang="en-US" sz="2800" dirty="0"/>
-          </a:p>
-        </p:txBody>
-      </p:sp>
-      <p:sp>
-        <p:nvSpPr>
-          <p:cNvPr id="3" name="Shape 1"/>
-          <p:cNvSpPr/>
-          <p:nvPr/>
-        </p:nvSpPr>
-        <p:spPr>
-          <a:xfrm>
-            <a:off x="365760" y="749808"/>
-            <a:ext cx="8412480" cy="0"/>
-          </a:xfrm>
-          <a:prstGeom prst="line">
-            <a:avLst/>
-          </a:prstGeom>
-          <a:noFill/>
-          <a:ln w="19050">
-            <a:solidFill>
-              <a:srgbClr val="C7922C"/>
-            </a:solidFill>
-            <a:prstDash val="solid"/>
-          </a:ln>
-        </p:spPr>
+            <a:pPr indent="0" marL="0">
+              <a:buNone/>
+            </a:pPr>
+            <a:r>
+              <a:rPr lang="en-US" sz="2200" b="1" dirty="0">
+                <a:solidFill>
+                  <a:srgbClr val="FFFFFF"/>
+                </a:solidFill>
+                <a:latin typeface="Calibri" pitchFamily="34" charset="0"/>
+                <a:ea typeface="Calibri" pitchFamily="34" charset="-122"/>
+                <a:cs typeface="Calibri" pitchFamily="34" charset="-120"/>
+              </a:rPr>
+              <a:t>✍️  10-Minute Write</a:t>
+            </a:r>
+            <a:endParaRPr lang="en-US" sz="2200" dirty="0"/>
+          </a:p>
+        </p:txBody>
       </p:sp>
       <p:sp>
         <p:nvSpPr>
@@ -3187,8 +2460,8 @@
         </p:nvSpPr>
         <p:spPr>
           <a:xfrm>
-            <a:off x="457200" y="1005840"/>
-            <a:ext cx="8046720" cy="292608"/>
+            <a:off x="365760" y="822960"/>
+            <a:ext cx="8229600" cy="237744"/>
           </a:xfrm>
           <a:prstGeom prst="rect">
             <a:avLst/>
@@ -3204,7 +2477,7 @@
               <a:buNone/>
             </a:pPr>
             <a:r>
-              <a:rPr lang="en-US" sz="1100" b="1" spc="200" kern="0" dirty="0">
+              <a:rPr lang="en-US" sz="1100" b="1" spc="100" kern="0" dirty="0">
                 <a:solidFill>
                   <a:srgbClr val="C7922C"/>
                 </a:solidFill>
@@ -3212,7 +2485,7 @@
                 <a:ea typeface="Calibri" pitchFamily="34" charset="-122"/>
                 <a:cs typeface="Calibri" pitchFamily="34" charset="-120"/>
               </a:rPr>
-              <a:t>📖 READ THE PROMPT — 1 MINUTE</a:t>
+              <a:t>READ THE PROMPT — 1 MINUTE</a:t>
             </a:r>
             <a:endParaRPr lang="en-US" sz="1100" dirty="0"/>
           </a:p>
@@ -3226,18 +2499,18 @@
         </p:nvSpPr>
         <p:spPr>
           <a:xfrm>
-            <a:off x="457200" y="1417320"/>
-            <a:ext cx="8229600" cy="1645920"/>
+            <a:off x="365760" y="1143000"/>
+            <a:ext cx="8412480" cy="1737360"/>
           </a:xfrm>
           <a:prstGeom prst="roundRect">
             <a:avLst>
-              <a:gd name="adj" fmla="val 5556"/>
+              <a:gd name="adj" fmla="val 5263"/>
             </a:avLst>
           </a:prstGeom>
           <a:solidFill>
             <a:srgbClr val="FEF6E8"/>
           </a:solidFill>
-          <a:ln w="12700">
+          <a:ln w="19050">
             <a:solidFill>
               <a:srgbClr val="C7922C"/>
             </a:solidFill>
@@ -3260,8 +2533,8 @@
         </p:nvSpPr>
         <p:spPr>
           <a:xfrm>
-            <a:off x="640080" y="1527048"/>
-            <a:ext cx="7863840" cy="1417320"/>
+            <a:off x="594360" y="1271016"/>
+            <a:ext cx="7955280" cy="1481328"/>
           </a:xfrm>
           <a:prstGeom prst="rect">
             <a:avLst/>
@@ -3277,7 +2550,7 @@
               <a:buNone/>
             </a:pPr>
             <a:r>
-              <a:rPr lang="en-US" sz="1800" i="1" dirty="0">
+              <a:rPr lang="en-US" sz="1700" dirty="0">
                 <a:solidFill>
                   <a:srgbClr val="1E293B"/>
                 </a:solidFill>
@@ -3285,9 +2558,9 @@
                 <a:ea typeface="Calibri" pitchFamily="34" charset="-122"/>
                 <a:cs typeface="Calibri" pitchFamily="34" charset="-120"/>
               </a:rPr>
-              <a:t>Edmund follows Lucy into Narnia but has a very different experience. Why do you think two people can visit the same place and feel completely different about it?</a:t>
-            </a:r>
-            <a:endParaRPr lang="en-US" sz="1800" dirty="0"/>
+              <a:t>Edmund lies about Narnia. Why do you think he does? Write what you believe.</a:t>
+            </a:r>
+            <a:endParaRPr lang="en-US" sz="1700" dirty="0"/>
           </a:p>
         </p:txBody>
       </p:sp>
@@ -3299,8 +2572,8 @@
         </p:nvSpPr>
         <p:spPr>
           <a:xfrm>
-            <a:off x="640080" y="3246120"/>
-            <a:ext cx="7863840" cy="457200"/>
+            <a:off x="365760" y="3063240"/>
+            <a:ext cx="8412480" cy="365760"/>
           </a:xfrm>
           <a:prstGeom prst="rect">
             <a:avLst/>
@@ -3316,59 +2589,17 @@
               <a:buNone/>
             </a:pPr>
             <a:r>
-              <a:rPr lang="en-US" sz="1400" b="1" dirty="0">
-                <a:solidFill>
-                  <a:srgbClr val="0E1C42"/>
-                </a:solidFill>
-                <a:latin typeface="Calibri" pitchFamily="34" charset="0"/>
-                <a:ea typeface="Calibri" pitchFamily="34" charset="-122"/>
-                <a:cs typeface="Calibri" pitchFamily="34" charset="-120"/>
-              </a:rPr>
-              <a:t>Type in the chat </a:t>
-            </a:r>
-            <a:pPr indent="0" marL="0">
-              <a:buNone/>
-            </a:pPr>
-            <a:r>
-              <a:rPr lang="en-US" sz="1400" dirty="0">
-                <a:solidFill>
-                  <a:srgbClr val="1E293B"/>
-                </a:solidFill>
-                <a:latin typeface="Calibri" pitchFamily="34" charset="0"/>
-                <a:ea typeface="Calibri" pitchFamily="34" charset="-122"/>
-                <a:cs typeface="Calibri" pitchFamily="34" charset="-120"/>
-              </a:rPr>
-              <a:t>or </a:t>
-            </a:r>
-            <a:pPr indent="0" marL="0">
-              <a:buNone/>
-            </a:pPr>
-            <a:r>
-              <a:rPr lang="en-US" sz="1400" b="1" dirty="0">
-                <a:solidFill>
-                  <a:srgbClr val="0E1C42"/>
-                </a:solidFill>
-                <a:latin typeface="Calibri" pitchFamily="34" charset="0"/>
-                <a:ea typeface="Calibri" pitchFamily="34" charset="-122"/>
-                <a:cs typeface="Calibri" pitchFamily="34" charset="-120"/>
-              </a:rPr>
-              <a:t>write on paper</a:t>
-            </a:r>
-            <a:pPr indent="0" marL="0">
-              <a:buNone/>
-            </a:pPr>
-            <a:r>
-              <a:rPr lang="en-US" sz="1400" dirty="0">
-                <a:solidFill>
-                  <a:srgbClr val="1E293B"/>
-                </a:solidFill>
-                <a:latin typeface="Calibri" pitchFamily="34" charset="0"/>
-                <a:ea typeface="Calibri" pitchFamily="34" charset="-122"/>
-                <a:cs typeface="Calibri" pitchFamily="34" charset="-120"/>
-              </a:rPr>
-              <a:t> to hold up when we share.</a:t>
-            </a:r>
-            <a:endParaRPr lang="en-US" sz="1400" dirty="0"/>
+              <a:rPr lang="en-US" sz="1600" i="1" dirty="0">
+                <a:solidFill>
+                  <a:srgbClr val="64748B"/>
+                </a:solidFill>
+                <a:latin typeface="Calibri" pitchFamily="34" charset="0"/>
+                <a:ea typeface="Calibri" pitchFamily="34" charset="-122"/>
+                <a:cs typeface="Calibri" pitchFamily="34" charset="-120"/>
+              </a:rPr>
+              <a:t>Think first. You will have five minutes to write.</a:t>
+            </a:r>
+            <a:endParaRPr lang="en-US" sz="1600" dirty="0"/>
           </a:p>
         </p:txBody>
       </p:sp>
@@ -3406,14 +2637,34 @@
       </p:grpSpPr>
       <p:sp>
         <p:nvSpPr>
-          <p:cNvPr id="2" name="Text 0"/>
-          <p:cNvSpPr/>
-          <p:nvPr/>
-        </p:nvSpPr>
-        <p:spPr>
-          <a:xfrm>
-            <a:off x="457200" y="228600"/>
-            <a:ext cx="8229600" cy="640080"/>
+          <p:cNvPr id="2" name="Shape 0"/>
+          <p:cNvSpPr/>
+          <p:nvPr/>
+        </p:nvSpPr>
+        <p:spPr>
+          <a:xfrm>
+            <a:off x="0" y="0"/>
+            <a:ext cx="9144000" cy="566928"/>
+          </a:xfrm>
+          <a:prstGeom prst="rect">
+            <a:avLst/>
+          </a:prstGeom>
+          <a:solidFill>
+            <a:srgbClr val="C7922C"/>
+          </a:solidFill>
+          <a:ln/>
+        </p:spPr>
+      </p:sp>
+      <p:sp>
+        <p:nvSpPr>
+          <p:cNvPr id="3" name="Text 1"/>
+          <p:cNvSpPr/>
+          <p:nvPr/>
+        </p:nvSpPr>
+        <p:spPr>
+          <a:xfrm>
+            <a:off x="365760" y="54864"/>
+            <a:ext cx="8412480" cy="457200"/>
           </a:xfrm>
           <a:prstGeom prst="rect">
             <a:avLst/>
@@ -3425,11 +2676,50 @@
           <a:bodyPr wrap="square" lIns="0" tIns="0" rIns="0" bIns="0" rtlCol="0" anchor="ctr"/>
           <a:lstStyle/>
           <a:p>
-            <a:pPr algn="ctr" indent="0" marL="0">
-              <a:buNone/>
-            </a:pPr>
-            <a:r>
-              <a:rPr lang="en-US" sz="3200" b="1" dirty="0">
+            <a:pPr indent="0" marL="0">
+              <a:buNone/>
+            </a:pPr>
+            <a:r>
+              <a:rPr lang="en-US" sz="2200" b="1" dirty="0">
+                <a:solidFill>
+                  <a:srgbClr val="FFFFFF"/>
+                </a:solidFill>
+                <a:latin typeface="Calibri" pitchFamily="34" charset="0"/>
+                <a:ea typeface="Calibri" pitchFamily="34" charset="-122"/>
+                <a:cs typeface="Calibri" pitchFamily="34" charset="-120"/>
+              </a:rPr>
+              <a:t>✍️  Writing Time</a:t>
+            </a:r>
+            <a:endParaRPr lang="en-US" sz="2200" dirty="0"/>
+          </a:p>
+        </p:txBody>
+      </p:sp>
+      <p:sp>
+        <p:nvSpPr>
+          <p:cNvPr id="4" name="Text 2"/>
+          <p:cNvSpPr/>
+          <p:nvPr/>
+        </p:nvSpPr>
+        <p:spPr>
+          <a:xfrm>
+            <a:off x="365760" y="868680"/>
+            <a:ext cx="8412480" cy="502920"/>
+          </a:xfrm>
+          <a:prstGeom prst="rect">
+            <a:avLst/>
+          </a:prstGeom>
+          <a:noFill/>
+          <a:ln/>
+        </p:spPr>
+        <p:txBody>
+          <a:bodyPr wrap="square" lIns="0" tIns="0" rIns="0" bIns="0" rtlCol="0" anchor="ctr"/>
+          <a:lstStyle/>
+          <a:p>
+            <a:pPr indent="0" marL="0">
+              <a:buNone/>
+            </a:pPr>
+            <a:r>
+              <a:rPr lang="en-US" sz="2600" b="1" dirty="0">
                 <a:solidFill>
                   <a:srgbClr val="0E1C42"/>
                 </a:solidFill>
@@ -3437,22 +2727,22 @@
                 <a:ea typeface="Calibri" pitchFamily="34" charset="-122"/>
                 <a:cs typeface="Calibri" pitchFamily="34" charset="-120"/>
               </a:rPr>
-              <a:t>✏️  Writing Time</a:t>
-            </a:r>
-            <a:endParaRPr lang="en-US" sz="3200" dirty="0"/>
-          </a:p>
-        </p:txBody>
-      </p:sp>
-      <p:sp>
-        <p:nvSpPr>
-          <p:cNvPr id="3" name="Text 1"/>
-          <p:cNvSpPr/>
-          <p:nvPr/>
-        </p:nvSpPr>
-        <p:spPr>
-          <a:xfrm>
-            <a:off x="914400" y="822960"/>
-            <a:ext cx="7315200" cy="365760"/>
+              <a:t>5 minutes — keep your pencil moving!</a:t>
+            </a:r>
+            <a:endParaRPr lang="en-US" sz="2600" dirty="0"/>
+          </a:p>
+        </p:txBody>
+      </p:sp>
+      <p:sp>
+        <p:nvSpPr>
+          <p:cNvPr id="5" name="Text 3"/>
+          <p:cNvSpPr/>
+          <p:nvPr/>
+        </p:nvSpPr>
+        <p:spPr>
+          <a:xfrm>
+            <a:off x="365760" y="1463040"/>
+            <a:ext cx="8229600" cy="237744"/>
           </a:xfrm>
           <a:prstGeom prst="rect">
             <a:avLst/>
@@ -3464,11 +2754,11 @@
           <a:bodyPr wrap="square" lIns="0" tIns="0" rIns="0" bIns="0" rtlCol="0" anchor="ctr"/>
           <a:lstStyle/>
           <a:p>
-            <a:pPr algn="ctr" indent="0" marL="0">
-              <a:buNone/>
-            </a:pPr>
-            <a:r>
-              <a:rPr lang="en-US" sz="1600" dirty="0">
+            <a:pPr indent="0" marL="0">
+              <a:buNone/>
+            </a:pPr>
+            <a:r>
+              <a:rPr lang="en-US" sz="1100" b="1" spc="100" kern="0" dirty="0">
                 <a:solidFill>
                   <a:srgbClr val="C7922C"/>
                 </a:solidFill>
@@ -3476,32 +2766,32 @@
                 <a:ea typeface="Calibri" pitchFamily="34" charset="-122"/>
                 <a:cs typeface="Calibri" pitchFamily="34" charset="-120"/>
               </a:rPr>
-              <a:t>5 minutes — keep your pencil moving!</a:t>
-            </a:r>
-            <a:endParaRPr lang="en-US" sz="1600" dirty="0"/>
-          </a:p>
-        </p:txBody>
-      </p:sp>
-      <p:sp>
-        <p:nvSpPr>
-          <p:cNvPr id="4" name="Shape 2"/>
-          <p:cNvSpPr/>
-          <p:nvPr/>
-        </p:nvSpPr>
-        <p:spPr>
-          <a:xfrm>
-            <a:off x="457200" y="1371600"/>
-            <a:ext cx="8229600" cy="1280160"/>
+              <a:t>YOUR PROMPT</a:t>
+            </a:r>
+            <a:endParaRPr lang="en-US" sz="1100" dirty="0"/>
+          </a:p>
+        </p:txBody>
+      </p:sp>
+      <p:sp>
+        <p:nvSpPr>
+          <p:cNvPr id="6" name="Shape 4"/>
+          <p:cNvSpPr/>
+          <p:nvPr/>
+        </p:nvSpPr>
+        <p:spPr>
+          <a:xfrm>
+            <a:off x="365760" y="1737360"/>
+            <a:ext cx="8412480" cy="1417320"/>
           </a:xfrm>
           <a:prstGeom prst="roundRect">
             <a:avLst>
-              <a:gd name="adj" fmla="val 7143"/>
+              <a:gd name="adj" fmla="val 6452"/>
             </a:avLst>
           </a:prstGeom>
           <a:solidFill>
             <a:srgbClr val="FFFFFF"/>
           </a:solidFill>
-          <a:ln w="12700">
+          <a:ln w="19050">
             <a:solidFill>
               <a:srgbClr val="C7922C"/>
             </a:solidFill>
@@ -3518,44 +2808,30 @@
       </p:sp>
       <p:sp>
         <p:nvSpPr>
-          <p:cNvPr id="5" name="Text 3"/>
-          <p:cNvSpPr/>
-          <p:nvPr/>
-        </p:nvSpPr>
-        <p:spPr>
-          <a:xfrm>
-            <a:off x="640080" y="1417320"/>
-            <a:ext cx="7863840" cy="1188720"/>
-          </a:xfrm>
-          <a:prstGeom prst="rect">
-            <a:avLst/>
-          </a:prstGeom>
-          <a:noFill/>
-          <a:ln/>
-        </p:spPr>
-        <p:txBody>
-          <a:bodyPr wrap="square" lIns="0" tIns="0" rIns="0" bIns="0" rtlCol="0" anchor="t"/>
-          <a:lstStyle/>
-          <a:p>
-            <a:pPr indent="0" marL="0">
-              <a:buNone/>
-            </a:pPr>
-            <a:r>
-              <a:rPr lang="en-US" sz="1200" b="1" dirty="0">
-                <a:solidFill>
-                  <a:srgbClr val="C7922C"/>
-                </a:solidFill>
-                <a:latin typeface="Calibri" pitchFamily="34" charset="0"/>
-                <a:ea typeface="Calibri" pitchFamily="34" charset="-122"/>
-                <a:cs typeface="Calibri" pitchFamily="34" charset="-120"/>
-              </a:rPr>
-              <a:t>📖 Prompt: </a:t>
-            </a:r>
-            <a:pPr indent="0" marL="0">
-              <a:buNone/>
-            </a:pPr>
-            <a:r>
-              <a:rPr lang="en-US" sz="1200" i="1" dirty="0">
+          <p:cNvPr id="7" name="Text 5"/>
+          <p:cNvSpPr/>
+          <p:nvPr/>
+        </p:nvSpPr>
+        <p:spPr>
+          <a:xfrm>
+            <a:off x="594360" y="1865376"/>
+            <a:ext cx="7955280" cy="1161288"/>
+          </a:xfrm>
+          <a:prstGeom prst="rect">
+            <a:avLst/>
+          </a:prstGeom>
+          <a:noFill/>
+          <a:ln/>
+        </p:spPr>
+        <p:txBody>
+          <a:bodyPr wrap="square" lIns="0" tIns="0" rIns="0" bIns="0" rtlCol="0" anchor="ctr"/>
+          <a:lstStyle/>
+          <a:p>
+            <a:pPr indent="0" marL="0">
+              <a:buNone/>
+            </a:pPr>
+            <a:r>
+              <a:rPr lang="en-US" sz="1700" dirty="0">
                 <a:solidFill>
                   <a:srgbClr val="1E293B"/>
                 </a:solidFill>
@@ -3563,122 +2839,48 @@
                 <a:ea typeface="Calibri" pitchFamily="34" charset="-122"/>
                 <a:cs typeface="Calibri" pitchFamily="34" charset="-120"/>
               </a:rPr>
-              <a:t>Edmund follows Lucy into Narnia but has a very different experience. Why do you think two people can visit the same place and feel completely different about it?</a:t>
-            </a:r>
-            <a:endParaRPr lang="en-US" sz="1200" dirty="0"/>
-          </a:p>
-        </p:txBody>
-      </p:sp>
-      <p:sp>
-        <p:nvSpPr>
-          <p:cNvPr id="6" name="Shape 4"/>
-          <p:cNvSpPr/>
-          <p:nvPr/>
-        </p:nvSpPr>
-        <p:spPr>
-          <a:xfrm>
-            <a:off x="2286000" y="2926080"/>
-            <a:ext cx="4572000" cy="1280160"/>
-          </a:xfrm>
-          <a:prstGeom prst="roundRect">
-            <a:avLst>
-              <a:gd name="adj" fmla="val 8571"/>
-            </a:avLst>
-          </a:prstGeom>
-          <a:solidFill>
-            <a:srgbClr val="FFFFFF"/>
-          </a:solidFill>
-          <a:ln/>
-          <a:effectLst>
-            <a:outerShdw sx="100000" sy="100000" kx="0" ky="0" algn="bl" rotWithShape="0" blurRad="101600" dist="38100" dir="2700000">
-              <a:srgbClr val="000000">
-                <a:alpha val="12000"/>
-              </a:srgbClr>
-            </a:outerShdw>
-          </a:effectLst>
-        </p:spPr>
-      </p:sp>
-      <p:sp>
-        <p:nvSpPr>
-          <p:cNvPr id="7" name="Text 5"/>
-          <p:cNvSpPr/>
-          <p:nvPr/>
-        </p:nvSpPr>
-        <p:spPr>
-          <a:xfrm>
-            <a:off x="2468880" y="3017520"/>
-            <a:ext cx="4206240" cy="1097280"/>
-          </a:xfrm>
-          <a:prstGeom prst="rect">
-            <a:avLst/>
-          </a:prstGeom>
-          <a:noFill/>
-          <a:ln/>
-        </p:spPr>
-        <p:txBody>
-          <a:bodyPr wrap="square" lIns="0" tIns="0" rIns="0" bIns="0" rtlCol="0" anchor="t"/>
-          <a:lstStyle/>
-          <a:p>
-            <a:pPr indent="0" marL="0">
-              <a:buNone/>
-            </a:pPr>
-            <a:r>
-              <a:rPr lang="en-US" sz="1400" b="1" dirty="0">
-                <a:solidFill>
-                  <a:srgbClr val="0E1C42"/>
-                </a:solidFill>
-                <a:latin typeface="Calibri" pitchFamily="34" charset="0"/>
-                <a:ea typeface="Calibri" pitchFamily="34" charset="-122"/>
-                <a:cs typeface="Calibri" pitchFamily="34" charset="-120"/>
-              </a:rPr>
-              <a:t>If you get stuck:
-</a:t>
-            </a:r>
-            <a:pPr indent="0" marL="0">
-              <a:buNone/>
-            </a:pPr>
-            <a:r>
-              <a:rPr lang="en-US" sz="1300" dirty="0">
-                <a:solidFill>
-                  <a:srgbClr val="1E293B"/>
-                </a:solidFill>
-                <a:latin typeface="Calibri" pitchFamily="34" charset="0"/>
-                <a:ea typeface="Calibri" pitchFamily="34" charset="-122"/>
-                <a:cs typeface="Calibri" pitchFamily="34" charset="-120"/>
-              </a:rPr>
-              <a:t>• Reread the prompt above
-</a:t>
-            </a:r>
-            <a:pPr indent="0" marL="0">
-              <a:buNone/>
-            </a:pPr>
-            <a:r>
-              <a:rPr lang="en-US" sz="1300" dirty="0">
-                <a:solidFill>
-                  <a:srgbClr val="1E293B"/>
-                </a:solidFill>
-                <a:latin typeface="Calibri" pitchFamily="34" charset="0"/>
-                <a:ea typeface="Calibri" pitchFamily="34" charset="-122"/>
-                <a:cs typeface="Calibri" pitchFamily="34" charset="-120"/>
-              </a:rPr>
-              <a:t>• Write "I'm thinking..." until a new idea comes
-</a:t>
-            </a:r>
-            <a:pPr indent="0" marL="0">
-              <a:buNone/>
-            </a:pPr>
-            <a:r>
-              <a:rPr lang="en-US" sz="1300" dirty="0">
-                <a:solidFill>
-                  <a:srgbClr val="1E293B"/>
-                </a:solidFill>
-                <a:latin typeface="Calibri" pitchFamily="34" charset="0"/>
-                <a:ea typeface="Calibri" pitchFamily="34" charset="-122"/>
-                <a:cs typeface="Calibri" pitchFamily="34" charset="-120"/>
-              </a:rPr>
-              <a:t>• Keep going — don't erase!</a:t>
-            </a:r>
-            <a:endParaRPr lang="en-US" sz="1400" dirty="0"/>
+              <a:t>Edmund lies about Narnia. Why do you think he does? Write what you believe.</a:t>
+            </a:r>
+            <a:endParaRPr lang="en-US" sz="1700" dirty="0"/>
+          </a:p>
+        </p:txBody>
+      </p:sp>
+      <p:sp>
+        <p:nvSpPr>
+          <p:cNvPr id="8" name="Text 6"/>
+          <p:cNvSpPr/>
+          <p:nvPr/>
+        </p:nvSpPr>
+        <p:spPr>
+          <a:xfrm>
+            <a:off x="365760" y="3291840"/>
+            <a:ext cx="8412480" cy="365760"/>
+          </a:xfrm>
+          <a:prstGeom prst="rect">
+            <a:avLst/>
+          </a:prstGeom>
+          <a:noFill/>
+          <a:ln/>
+        </p:spPr>
+        <p:txBody>
+          <a:bodyPr wrap="square" lIns="0" tIns="0" rIns="0" bIns="0" rtlCol="0" anchor="ctr"/>
+          <a:lstStyle/>
+          <a:p>
+            <a:pPr indent="0" marL="0">
+              <a:buNone/>
+            </a:pPr>
+            <a:r>
+              <a:rPr lang="en-US" sz="1500" i="1" dirty="0">
+                <a:solidFill>
+                  <a:srgbClr val="64748B"/>
+                </a:solidFill>
+                <a:latin typeface="Calibri" pitchFamily="34" charset="0"/>
+                <a:ea typeface="Calibri" pitchFamily="34" charset="-122"/>
+                <a:cs typeface="Calibri" pitchFamily="34" charset="-120"/>
+              </a:rPr>
+              <a:t>Do not stop to erase. If you get stuck, write the last word again and keep going.</a:t>
+            </a:r>
+            <a:endParaRPr lang="en-US" sz="1500" dirty="0"/>
           </a:p>
         </p:txBody>
       </p:sp>
@@ -3716,14 +2918,34 @@
       </p:grpSpPr>
       <p:sp>
         <p:nvSpPr>
-          <p:cNvPr id="2" name="Text 0"/>
-          <p:cNvSpPr/>
-          <p:nvPr/>
-        </p:nvSpPr>
-        <p:spPr>
-          <a:xfrm>
-            <a:off x="3657600" y="365760"/>
-            <a:ext cx="1828800" cy="640080"/>
+          <p:cNvPr id="2" name="Shape 0"/>
+          <p:cNvSpPr/>
+          <p:nvPr/>
+        </p:nvSpPr>
+        <p:spPr>
+          <a:xfrm>
+            <a:off x="0" y="0"/>
+            <a:ext cx="9144000" cy="566928"/>
+          </a:xfrm>
+          <a:prstGeom prst="rect">
+            <a:avLst/>
+          </a:prstGeom>
+          <a:solidFill>
+            <a:srgbClr val="34B76F"/>
+          </a:solidFill>
+          <a:ln/>
+        </p:spPr>
+      </p:sp>
+      <p:sp>
+        <p:nvSpPr>
+          <p:cNvPr id="3" name="Text 1"/>
+          <p:cNvSpPr/>
+          <p:nvPr/>
+        </p:nvSpPr>
+        <p:spPr>
+          <a:xfrm>
+            <a:off x="365760" y="54864"/>
+            <a:ext cx="8412480" cy="457200"/>
           </a:xfrm>
           <a:prstGeom prst="rect">
             <a:avLst/>
@@ -3735,31 +2957,34 @@
           <a:bodyPr wrap="square" lIns="0" tIns="0" rIns="0" bIns="0" rtlCol="0" anchor="ctr"/>
           <a:lstStyle/>
           <a:p>
-            <a:pPr algn="ctr" indent="0" marL="0">
-              <a:buNone/>
-            </a:pPr>
-            <a:r>
-              <a:rPr lang="en-US" sz="4000" dirty="0">
-                <a:solidFill>
-                  <a:srgbClr val="000000"/>
-                </a:solidFill>
-              </a:rPr>
-              <a:t>🔍</a:t>
-            </a:r>
-            <a:endParaRPr lang="en-US" sz="4000" dirty="0"/>
-          </a:p>
-        </p:txBody>
-      </p:sp>
-      <p:sp>
-        <p:nvSpPr>
-          <p:cNvPr id="3" name="Text 1"/>
-          <p:cNvSpPr/>
-          <p:nvPr/>
-        </p:nvSpPr>
-        <p:spPr>
-          <a:xfrm>
-            <a:off x="914400" y="914400"/>
-            <a:ext cx="7315200" cy="640080"/>
+            <a:pPr indent="0" marL="0">
+              <a:buNone/>
+            </a:pPr>
+            <a:r>
+              <a:rPr lang="en-US" sz="2200" b="1" dirty="0">
+                <a:solidFill>
+                  <a:srgbClr val="FFFFFF"/>
+                </a:solidFill>
+                <a:latin typeface="Calibri" pitchFamily="34" charset="0"/>
+                <a:ea typeface="Calibri" pitchFamily="34" charset="-122"/>
+                <a:cs typeface="Calibri" pitchFamily="34" charset="-120"/>
+              </a:rPr>
+              <a:t>🔍  Edit &amp; Revise</a:t>
+            </a:r>
+            <a:endParaRPr lang="en-US" sz="2200" dirty="0"/>
+          </a:p>
+        </p:txBody>
+      </p:sp>
+      <p:sp>
+        <p:nvSpPr>
+          <p:cNvPr id="4" name="Text 2"/>
+          <p:cNvSpPr/>
+          <p:nvPr/>
+        </p:nvSpPr>
+        <p:spPr>
+          <a:xfrm>
+            <a:off x="365760" y="868680"/>
+            <a:ext cx="8412480" cy="457200"/>
           </a:xfrm>
           <a:prstGeom prst="rect">
             <a:avLst/>
@@ -3771,11 +2996,11 @@
           <a:bodyPr wrap="square" lIns="0" tIns="0" rIns="0" bIns="0" rtlCol="0" anchor="ctr"/>
           <a:lstStyle/>
           <a:p>
-            <a:pPr algn="ctr" indent="0" marL="0">
-              <a:buNone/>
-            </a:pPr>
-            <a:r>
-              <a:rPr lang="en-US" sz="3200" b="1" dirty="0">
+            <a:pPr indent="0" marL="0">
+              <a:buNone/>
+            </a:pPr>
+            <a:r>
+              <a:rPr lang="en-US" sz="2400" b="1" dirty="0">
                 <a:solidFill>
                   <a:srgbClr val="0E1C42"/>
                 </a:solidFill>
@@ -3783,22 +3008,22 @@
                 <a:ea typeface="Calibri" pitchFamily="34" charset="-122"/>
                 <a:cs typeface="Calibri" pitchFamily="34" charset="-120"/>
               </a:rPr>
-              <a:t>Edit &amp; Revise</a:t>
-            </a:r>
-            <a:endParaRPr lang="en-US" sz="3200" dirty="0"/>
-          </a:p>
-        </p:txBody>
-      </p:sp>
-      <p:sp>
-        <p:nvSpPr>
-          <p:cNvPr id="4" name="Text 2"/>
-          <p:cNvSpPr/>
-          <p:nvPr/>
-        </p:nvSpPr>
-        <p:spPr>
-          <a:xfrm>
-            <a:off x="914400" y="1508760"/>
-            <a:ext cx="7315200" cy="457200"/>
+              <a:t>1 minute — pick ONE thing to fix.</a:t>
+            </a:r>
+            <a:endParaRPr lang="en-US" sz="2400" dirty="0"/>
+          </a:p>
+        </p:txBody>
+      </p:sp>
+      <p:sp>
+        <p:nvSpPr>
+          <p:cNvPr id="5" name="Text 3"/>
+          <p:cNvSpPr/>
+          <p:nvPr/>
+        </p:nvSpPr>
+        <p:spPr>
+          <a:xfrm>
+            <a:off x="365760" y="1417320"/>
+            <a:ext cx="8229600" cy="237744"/>
           </a:xfrm>
           <a:prstGeom prst="rect">
             <a:avLst/>
@@ -3810,11 +3035,11 @@
           <a:bodyPr wrap="square" lIns="0" tIns="0" rIns="0" bIns="0" rtlCol="0" anchor="ctr"/>
           <a:lstStyle/>
           <a:p>
-            <a:pPr algn="ctr" indent="0" marL="0">
-              <a:buNone/>
-            </a:pPr>
-            <a:r>
-              <a:rPr lang="en-US" sz="1600" dirty="0">
+            <a:pPr indent="0" marL="0">
+              <a:buNone/>
+            </a:pPr>
+            <a:r>
+              <a:rPr lang="en-US" sz="1100" b="1" spc="100" kern="0" dirty="0">
                 <a:solidFill>
                   <a:srgbClr val="34B76F"/>
                 </a:solidFill>
@@ -3822,26 +3047,26 @@
                 <a:ea typeface="Calibri" pitchFamily="34" charset="-122"/>
                 <a:cs typeface="Calibri" pitchFamily="34" charset="-120"/>
               </a:rPr>
-              <a:t>1 minute — pick ONE thing to fix</a:t>
-            </a:r>
-            <a:endParaRPr lang="en-US" sz="1600" dirty="0"/>
-          </a:p>
-        </p:txBody>
-      </p:sp>
-      <p:sp>
-        <p:nvSpPr>
-          <p:cNvPr id="5" name="Shape 3"/>
-          <p:cNvSpPr/>
-          <p:nvPr/>
-        </p:nvSpPr>
-        <p:spPr>
-          <a:xfrm>
-            <a:off x="1371600" y="2103120"/>
-            <a:ext cx="6400800" cy="640080"/>
+              <a:t>TODAY'S EDIT FOCUS</a:t>
+            </a:r>
+            <a:endParaRPr lang="en-US" sz="1100" dirty="0"/>
+          </a:p>
+        </p:txBody>
+      </p:sp>
+      <p:sp>
+        <p:nvSpPr>
+          <p:cNvPr id="6" name="Shape 4"/>
+          <p:cNvSpPr/>
+          <p:nvPr/>
+        </p:nvSpPr>
+        <p:spPr>
+          <a:xfrm>
+            <a:off x="365760" y="1691640"/>
+            <a:ext cx="8412480" cy="777240"/>
           </a:xfrm>
           <a:prstGeom prst="roundRect">
             <a:avLst>
-              <a:gd name="adj" fmla="val 14286"/>
+              <a:gd name="adj" fmla="val 11765"/>
             </a:avLst>
           </a:prstGeom>
           <a:solidFill>
@@ -3864,14 +3089,14 @@
       </p:sp>
       <p:sp>
         <p:nvSpPr>
-          <p:cNvPr id="6" name="Text 4"/>
-          <p:cNvSpPr/>
-          <p:nvPr/>
-        </p:nvSpPr>
-        <p:spPr>
-          <a:xfrm>
-            <a:off x="1554480" y="2148840"/>
-            <a:ext cx="6035040" cy="548640"/>
+          <p:cNvPr id="7" name="Text 5"/>
+          <p:cNvSpPr/>
+          <p:nvPr/>
+        </p:nvSpPr>
+        <p:spPr>
+          <a:xfrm>
+            <a:off x="594360" y="1819656"/>
+            <a:ext cx="7955280" cy="521208"/>
           </a:xfrm>
           <a:prstGeom prst="rect">
             <a:avLst/>
@@ -3887,21 +3112,7 @@
               <a:buNone/>
             </a:pPr>
             <a:r>
-              <a:rPr lang="en-US" sz="1400" b="1" dirty="0">
-                <a:solidFill>
-                  <a:srgbClr val="34B76F"/>
-                </a:solidFill>
-                <a:latin typeface="Calibri" pitchFamily="34" charset="0"/>
-                <a:ea typeface="Calibri" pitchFamily="34" charset="-122"/>
-                <a:cs typeface="Calibri" pitchFamily="34" charset="-120"/>
-              </a:rPr>
-              <a:t>Today's check: </a:t>
-            </a:r>
-            <a:pPr indent="0" marL="0">
-              <a:buNone/>
-            </a:pPr>
-            <a:r>
-              <a:rPr lang="en-US" sz="1400" dirty="0">
+              <a:rPr lang="en-US" sz="1700" dirty="0">
                 <a:solidFill>
                   <a:srgbClr val="1E293B"/>
                 </a:solidFill>
@@ -3909,40 +3120,11 @@
                 <a:ea typeface="Calibri" pitchFamily="34" charset="-122"/>
                 <a:cs typeface="Calibri" pitchFamily="34" charset="-120"/>
               </a:rPr>
-              <a:t>Did I give at least one example or reason?</a:t>
-            </a:r>
-            <a:endParaRPr lang="en-US" sz="1400" dirty="0"/>
-          </a:p>
-        </p:txBody>
-      </p:sp>
-      <p:sp>
-        <p:nvSpPr>
-          <p:cNvPr id="7" name="Shape 5"/>
-          <p:cNvSpPr/>
-          <p:nvPr/>
-        </p:nvSpPr>
-        <p:spPr>
-          <a:xfrm>
-            <a:off x="1371600" y="2926080"/>
-            <a:ext cx="6400800" cy="1463040"/>
-          </a:xfrm>
-          <a:prstGeom prst="roundRect">
-            <a:avLst>
-              <a:gd name="adj" fmla="val 6250"/>
-            </a:avLst>
-          </a:prstGeom>
-          <a:solidFill>
-            <a:srgbClr val="FFFFFF"/>
-          </a:solidFill>
-          <a:ln/>
-          <a:effectLst>
-            <a:outerShdw sx="100000" sy="100000" kx="0" ky="0" algn="bl" rotWithShape="0" blurRad="101600" dist="38100" dir="2700000">
-              <a:srgbClr val="000000">
-                <a:alpha val="12000"/>
-              </a:srgbClr>
-            </a:outerShdw>
-          </a:effectLst>
-        </p:spPr>
+              <a:t>Did I use a capital letter for every name?</a:t>
+            </a:r>
+            <a:endParaRPr lang="en-US" sz="1700" dirty="0"/>
+          </a:p>
+        </p:txBody>
       </p:sp>
       <p:sp>
         <p:nvSpPr>
@@ -3952,45 +3134,24 @@
         </p:nvSpPr>
         <p:spPr>
           <a:xfrm>
-            <a:off x="1554480" y="3017520"/>
-            <a:ext cx="6035040" cy="1280160"/>
-          </a:xfrm>
-          <a:prstGeom prst="rect">
-            <a:avLst/>
-          </a:prstGeom>
-          <a:noFill/>
-          <a:ln/>
-        </p:spPr>
-        <p:txBody>
-          <a:bodyPr wrap="square" lIns="0" tIns="0" rIns="0" bIns="0" rtlCol="0" anchor="t"/>
-          <a:lstStyle/>
-          <a:p>
-            <a:pPr indent="0" marL="0">
-              <a:spcAft>
-                <a:spcPts val="200"/>
-              </a:spcAft>
-              <a:buNone/>
-            </a:pPr>
-            <a:r>
-              <a:rPr lang="en-US" sz="1300" b="1" dirty="0">
-                <a:solidFill>
-                  <a:srgbClr val="0E1C42"/>
-                </a:solidFill>
-                <a:latin typeface="Calibri" pitchFamily="34" charset="0"/>
-                <a:ea typeface="Calibri" pitchFamily="34" charset="-122"/>
-                <a:cs typeface="Calibri" pitchFamily="34" charset="-120"/>
-              </a:rPr>
-              <a:t>Quick check:
-</a:t>
-            </a:r>
-            <a:pPr indent="0" marL="0">
-              <a:spcAft>
-                <a:spcPts val="200"/>
-              </a:spcAft>
-              <a:buNone/>
-            </a:pPr>
-            <a:r>
-              <a:rPr lang="en-US" sz="1200" dirty="0">
+            <a:off x="365760" y="2651760"/>
+            <a:ext cx="8412480" cy="365760"/>
+          </a:xfrm>
+          <a:prstGeom prst="rect">
+            <a:avLst/>
+          </a:prstGeom>
+          <a:noFill/>
+          <a:ln/>
+        </p:spPr>
+        <p:txBody>
+          <a:bodyPr wrap="square" lIns="0" tIns="0" rIns="0" bIns="0" rtlCol="0" anchor="ctr"/>
+          <a:lstStyle/>
+          <a:p>
+            <a:pPr indent="0" marL="0">
+              <a:buNone/>
+            </a:pPr>
+            <a:r>
+              <a:rPr lang="en-US" sz="1500" b="1" dirty="0">
                 <a:solidFill>
                   <a:srgbClr val="1E293B"/>
                 </a:solidFill>
@@ -3998,17 +3159,13 @@
                 <a:ea typeface="Calibri" pitchFamily="34" charset="-122"/>
                 <a:cs typeface="Calibri" pitchFamily="34" charset="-120"/>
               </a:rPr>
-              <a:t>□ Capital letters at the start of every sentence
-</a:t>
-            </a:r>
-            <a:pPr indent="0" marL="0">
-              <a:spcAft>
-                <a:spcPts val="200"/>
-              </a:spcAft>
-              <a:buNone/>
-            </a:pPr>
-            <a:r>
-              <a:rPr lang="en-US" sz="1200" dirty="0">
+              <a:t>Quick check:  </a:t>
+            </a:r>
+            <a:pPr indent="0" marL="0">
+              <a:buNone/>
+            </a:pPr>
+            <a:r>
+              <a:rPr lang="en-US" sz="1500" dirty="0">
                 <a:solidFill>
                   <a:srgbClr val="1E293B"/>
                 </a:solidFill>
@@ -4016,45 +3173,9 @@
                 <a:ea typeface="Calibri" pitchFamily="34" charset="-122"/>
                 <a:cs typeface="Calibri" pitchFamily="34" charset="-120"/>
               </a:rPr>
-              <a:t>□ End punctuation ( .  ?  ! )
-</a:t>
-            </a:r>
-            <a:pPr indent="0" marL="0">
-              <a:spcAft>
-                <a:spcPts val="200"/>
-              </a:spcAft>
-              <a:buNone/>
-            </a:pPr>
-            <a:r>
-              <a:rPr lang="en-US" sz="1200" dirty="0">
-                <a:solidFill>
-                  <a:srgbClr val="1E293B"/>
-                </a:solidFill>
-                <a:latin typeface="Calibri" pitchFamily="34" charset="0"/>
-                <a:ea typeface="Calibri" pitchFamily="34" charset="-122"/>
-                <a:cs typeface="Calibri" pitchFamily="34" charset="-120"/>
-              </a:rPr>
-              <a:t>□ Spelling — circle any words that look wrong
-</a:t>
-            </a:r>
-            <a:pPr indent="0" marL="0">
-              <a:spcAft>
-                <a:spcPts val="200"/>
-              </a:spcAft>
-              <a:buNone/>
-            </a:pPr>
-            <a:r>
-              <a:rPr lang="en-US" sz="1200" dirty="0">
-                <a:solidFill>
-                  <a:srgbClr val="1E293B"/>
-                </a:solidFill>
-                <a:latin typeface="Calibri" pitchFamily="34" charset="0"/>
-                <a:ea typeface="Calibri" pitchFamily="34" charset="-122"/>
-                <a:cs typeface="Calibri" pitchFamily="34" charset="-120"/>
-              </a:rPr>
-              <a:t>□ Read it quietly to yourself — does it sound right?</a:t>
-            </a:r>
-            <a:endParaRPr lang="en-US" sz="1300" dirty="0"/>
+              <a:t>capitals  ·  end punctuation  ·  circle a word you are unsure of  ·  read it aloud</a:t>
+            </a:r>
+            <a:endParaRPr lang="en-US" sz="1500" dirty="0"/>
           </a:p>
         </p:txBody>
       </p:sp>
@@ -4092,14 +3213,34 @@
       </p:grpSpPr>
       <p:sp>
         <p:nvSpPr>
-          <p:cNvPr id="2" name="Text 0"/>
-          <p:cNvSpPr/>
-          <p:nvPr/>
-        </p:nvSpPr>
-        <p:spPr>
-          <a:xfrm>
-            <a:off x="3657600" y="457200"/>
-            <a:ext cx="1828800" cy="731520"/>
+          <p:cNvPr id="2" name="Shape 0"/>
+          <p:cNvSpPr/>
+          <p:nvPr/>
+        </p:nvSpPr>
+        <p:spPr>
+          <a:xfrm>
+            <a:off x="0" y="0"/>
+            <a:ext cx="9144000" cy="566928"/>
+          </a:xfrm>
+          <a:prstGeom prst="rect">
+            <a:avLst/>
+          </a:prstGeom>
+          <a:solidFill>
+            <a:srgbClr val="55C8E8"/>
+          </a:solidFill>
+          <a:ln/>
+        </p:spPr>
+      </p:sp>
+      <p:sp>
+        <p:nvSpPr>
+          <p:cNvPr id="3" name="Text 1"/>
+          <p:cNvSpPr/>
+          <p:nvPr/>
+        </p:nvSpPr>
+        <p:spPr>
+          <a:xfrm>
+            <a:off x="365760" y="54864"/>
+            <a:ext cx="8412480" cy="457200"/>
           </a:xfrm>
           <a:prstGeom prst="rect">
             <a:avLst/>
@@ -4111,31 +3252,34 @@
           <a:bodyPr wrap="square" lIns="0" tIns="0" rIns="0" bIns="0" rtlCol="0" anchor="ctr"/>
           <a:lstStyle/>
           <a:p>
-            <a:pPr algn="ctr" indent="0" marL="0">
-              <a:buNone/>
-            </a:pPr>
-            <a:r>
-              <a:rPr lang="en-US" sz="4400" dirty="0">
-                <a:solidFill>
-                  <a:srgbClr val="000000"/>
-                </a:solidFill>
-              </a:rPr>
-              <a:t>🗣️</a:t>
-            </a:r>
-            <a:endParaRPr lang="en-US" sz="4400" dirty="0"/>
-          </a:p>
-        </p:txBody>
-      </p:sp>
-      <p:sp>
-        <p:nvSpPr>
-          <p:cNvPr id="3" name="Text 1"/>
-          <p:cNvSpPr/>
-          <p:nvPr/>
-        </p:nvSpPr>
-        <p:spPr>
-          <a:xfrm>
-            <a:off x="914400" y="1097280"/>
-            <a:ext cx="7315200" cy="640080"/>
+            <a:pPr indent="0" marL="0">
+              <a:buNone/>
+            </a:pPr>
+            <a:r>
+              <a:rPr lang="en-US" sz="2200" b="1" dirty="0">
+                <a:solidFill>
+                  <a:srgbClr val="FFFFFF"/>
+                </a:solidFill>
+                <a:latin typeface="Calibri" pitchFamily="34" charset="0"/>
+                <a:ea typeface="Calibri" pitchFamily="34" charset="-122"/>
+                <a:cs typeface="Calibri" pitchFamily="34" charset="-120"/>
+              </a:rPr>
+              <a:t>🗣️  Share Time</a:t>
+            </a:r>
+            <a:endParaRPr lang="en-US" sz="2200" dirty="0"/>
+          </a:p>
+        </p:txBody>
+      </p:sp>
+      <p:sp>
+        <p:nvSpPr>
+          <p:cNvPr id="4" name="Text 2"/>
+          <p:cNvSpPr/>
+          <p:nvPr/>
+        </p:nvSpPr>
+        <p:spPr>
+          <a:xfrm>
+            <a:off x="365760" y="1005840"/>
+            <a:ext cx="8412480" cy="548640"/>
           </a:xfrm>
           <a:prstGeom prst="rect">
             <a:avLst/>
@@ -4147,11 +3291,11 @@
           <a:bodyPr wrap="square" lIns="0" tIns="0" rIns="0" bIns="0" rtlCol="0" anchor="ctr"/>
           <a:lstStyle/>
           <a:p>
-            <a:pPr algn="ctr" indent="0" marL="0">
-              <a:buNone/>
-            </a:pPr>
-            <a:r>
-              <a:rPr lang="en-US" sz="3400" b="1" dirty="0">
+            <a:pPr indent="0" marL="0">
+              <a:buNone/>
+            </a:pPr>
+            <a:r>
+              <a:rPr lang="en-US" sz="2600" b="1" dirty="0">
                 <a:solidFill>
                   <a:srgbClr val="0E1C42"/>
                 </a:solidFill>
@@ -4159,22 +3303,22 @@
                 <a:ea typeface="Calibri" pitchFamily="34" charset="-122"/>
                 <a:cs typeface="Calibri" pitchFamily="34" charset="-120"/>
               </a:rPr>
-              <a:t>Share Time</a:t>
-            </a:r>
-            <a:endParaRPr lang="en-US" sz="3400" dirty="0"/>
-          </a:p>
-        </p:txBody>
-      </p:sp>
-      <p:sp>
-        <p:nvSpPr>
-          <p:cNvPr id="4" name="Text 2"/>
-          <p:cNvSpPr/>
-          <p:nvPr/>
-        </p:nvSpPr>
-        <p:spPr>
-          <a:xfrm>
-            <a:off x="914400" y="1737360"/>
-            <a:ext cx="7315200" cy="457200"/>
+              <a:t>3 minutes — let's hear your writing!</a:t>
+            </a:r>
+            <a:endParaRPr lang="en-US" sz="2600" dirty="0"/>
+          </a:p>
+        </p:txBody>
+      </p:sp>
+      <p:sp>
+        <p:nvSpPr>
+          <p:cNvPr id="5" name="Text 3"/>
+          <p:cNvSpPr/>
+          <p:nvPr/>
+        </p:nvSpPr>
+        <p:spPr>
+          <a:xfrm>
+            <a:off x="365760" y="1691640"/>
+            <a:ext cx="8412480" cy="457200"/>
           </a:xfrm>
           <a:prstGeom prst="rect">
             <a:avLst/>
@@ -4186,164 +3330,21 @@
           <a:bodyPr wrap="square" lIns="0" tIns="0" rIns="0" bIns="0" rtlCol="0" anchor="ctr"/>
           <a:lstStyle/>
           <a:p>
-            <a:pPr algn="ctr" indent="0" marL="0">
+            <a:pPr indent="0" marL="0">
               <a:buNone/>
             </a:pPr>
             <a:r>
               <a:rPr lang="en-US" sz="1700" dirty="0">
                 <a:solidFill>
-                  <a:srgbClr val="55C8E8"/>
-                </a:solidFill>
-                <a:latin typeface="Calibri" pitchFamily="34" charset="0"/>
-                <a:ea typeface="Calibri" pitchFamily="34" charset="-122"/>
-                <a:cs typeface="Calibri" pitchFamily="34" charset="-120"/>
-              </a:rPr>
-              <a:t>3 minutes — let's hear your writing!</a:t>
+                  <a:srgbClr val="1E293B"/>
+                </a:solidFill>
+                <a:latin typeface="Calibri" pitchFamily="34" charset="0"/>
+                <a:ea typeface="Calibri" pitchFamily="34" charset="-122"/>
+                <a:cs typeface="Calibri" pitchFamily="34" charset="-120"/>
+              </a:rPr>
+              <a:t>Raise your hand  ·  paste it in the chat  ·  or hold your paper up to the camera</a:t>
             </a:r>
             <a:endParaRPr lang="en-US" sz="1700" dirty="0"/>
-          </a:p>
-        </p:txBody>
-      </p:sp>
-      <p:sp>
-        <p:nvSpPr>
-          <p:cNvPr id="5" name="Shape 3"/>
-          <p:cNvSpPr/>
-          <p:nvPr/>
-        </p:nvSpPr>
-        <p:spPr>
-          <a:xfrm>
-            <a:off x="1828800" y="2468880"/>
-            <a:ext cx="5486400" cy="1645920"/>
-          </a:xfrm>
-          <a:prstGeom prst="roundRect">
-            <a:avLst>
-              <a:gd name="adj" fmla="val 6667"/>
-            </a:avLst>
-          </a:prstGeom>
-          <a:solidFill>
-            <a:srgbClr val="FFFFFF"/>
-          </a:solidFill>
-          <a:ln/>
-          <a:effectLst>
-            <a:outerShdw sx="100000" sy="100000" kx="0" ky="0" algn="bl" rotWithShape="0" blurRad="101600" dist="38100" dir="2700000">
-              <a:srgbClr val="000000">
-                <a:alpha val="12000"/>
-              </a:srgbClr>
-            </a:outerShdw>
-          </a:effectLst>
-        </p:spPr>
-      </p:sp>
-      <p:sp>
-        <p:nvSpPr>
-          <p:cNvPr id="6" name="Text 4"/>
-          <p:cNvSpPr/>
-          <p:nvPr/>
-        </p:nvSpPr>
-        <p:spPr>
-          <a:xfrm>
-            <a:off x="2103120" y="2560320"/>
-            <a:ext cx="4937760" cy="1463040"/>
-          </a:xfrm>
-          <a:prstGeom prst="rect">
-            <a:avLst/>
-          </a:prstGeom>
-          <a:noFill/>
-          <a:ln/>
-        </p:spPr>
-        <p:txBody>
-          <a:bodyPr wrap="square" lIns="0" tIns="0" rIns="0" bIns="0" rtlCol="0" anchor="t"/>
-          <a:lstStyle/>
-          <a:p>
-            <a:pPr indent="0" marL="0">
-              <a:spcAft>
-                <a:spcPts val="200"/>
-              </a:spcAft>
-              <a:buNone/>
-            </a:pPr>
-            <a:r>
-              <a:rPr lang="en-US" sz="1400" b="1" dirty="0">
-                <a:solidFill>
-                  <a:srgbClr val="0E1C42"/>
-                </a:solidFill>
-                <a:latin typeface="Calibri" pitchFamily="34" charset="0"/>
-                <a:ea typeface="Calibri" pitchFamily="34" charset="-122"/>
-                <a:cs typeface="Calibri" pitchFamily="34" charset="-120"/>
-              </a:rPr>
-              <a:t>How to share:
-</a:t>
-            </a:r>
-            <a:pPr indent="0" marL="0">
-              <a:spcAft>
-                <a:spcPts val="200"/>
-              </a:spcAft>
-              <a:buNone/>
-            </a:pPr>
-            <a:r>
-              <a:rPr lang="en-US" sz="1300" dirty="0">
-                <a:solidFill>
-                  <a:srgbClr val="1E293B"/>
-                </a:solidFill>
-                <a:latin typeface="Calibri" pitchFamily="34" charset="0"/>
-                <a:ea typeface="Calibri" pitchFamily="34" charset="-122"/>
-                <a:cs typeface="Calibri" pitchFamily="34" charset="-120"/>
-              </a:rPr>
-              <a:t>✋ Raise your hand if you want to read yours aloud
-</a:t>
-            </a:r>
-            <a:pPr indent="0" marL="0">
-              <a:spcAft>
-                <a:spcPts val="200"/>
-              </a:spcAft>
-              <a:buNone/>
-            </a:pPr>
-            <a:r>
-              <a:rPr lang="en-US" sz="1300" dirty="0">
-                <a:solidFill>
-                  <a:srgbClr val="1E293B"/>
-                </a:solidFill>
-                <a:latin typeface="Calibri" pitchFamily="34" charset="0"/>
-                <a:ea typeface="Calibri" pitchFamily="34" charset="-122"/>
-                <a:cs typeface="Calibri" pitchFamily="34" charset="-120"/>
-              </a:rPr>
-              <a:t>💬 Or paste your writing in the chat
-</a:t>
-            </a:r>
-            <a:pPr indent="0" marL="0">
-              <a:spcAft>
-                <a:spcPts val="200"/>
-              </a:spcAft>
-              <a:buNone/>
-            </a:pPr>
-            <a:r>
-              <a:rPr lang="en-US" sz="1300" dirty="0">
-                <a:solidFill>
-                  <a:srgbClr val="1E293B"/>
-                </a:solidFill>
-                <a:latin typeface="Calibri" pitchFamily="34" charset="0"/>
-                <a:ea typeface="Calibri" pitchFamily="34" charset="-122"/>
-                <a:cs typeface="Calibri" pitchFamily="34" charset="-120"/>
-              </a:rPr>
-              <a:t>👂 Listen respectfully when others share
-</a:t>
-            </a:r>
-            <a:pPr indent="0" marL="0">
-              <a:spcAft>
-                <a:spcPts val="200"/>
-              </a:spcAft>
-              <a:buNone/>
-            </a:pPr>
-            <a:r>
-              <a:rPr lang="en-US" sz="1200" i="1" dirty="0">
-                <a:solidFill>
-                  <a:srgbClr val="64748B"/>
-                </a:solidFill>
-                <a:latin typeface="Calibri" pitchFamily="34" charset="0"/>
-                <a:ea typeface="Calibri" pitchFamily="34" charset="-122"/>
-                <a:cs typeface="Calibri" pitchFamily="34" charset="-120"/>
-              </a:rPr>
-              <a:t>Every writer's ideas matter — there are no wrong answers.</a:t>
-            </a:r>
-            <a:endParaRPr lang="en-US" sz="1400" dirty="0"/>
           </a:p>
         </p:txBody>
       </p:sp>
@@ -4361,7 +3362,7 @@
     <p:bg>
       <p:bgPr>
         <a:solidFill>
-          <a:srgbClr val="E5F7FC"/>
+          <a:srgbClr val="F8FAFC"/>
         </a:solidFill>
       </p:bgPr>
     </p:bg>
@@ -4381,81 +3382,17 @@
       </p:grpSpPr>
       <p:sp>
         <p:nvSpPr>
-          <p:cNvPr id="2" name="Text 0"/>
-          <p:cNvSpPr/>
-          <p:nvPr/>
-        </p:nvSpPr>
-        <p:spPr>
-          <a:xfrm>
-            <a:off x="365760" y="164592"/>
-            <a:ext cx="5943600" cy="566928"/>
-          </a:xfrm>
-          <a:prstGeom prst="rect">
-            <a:avLst/>
-          </a:prstGeom>
-          <a:noFill/>
-          <a:ln/>
-        </p:spPr>
-        <p:txBody>
-          <a:bodyPr wrap="square" lIns="0" tIns="0" rIns="0" bIns="0" rtlCol="0" anchor="ctr"/>
-          <a:lstStyle/>
-          <a:p>
-            <a:pPr algn="l" indent="0" marL="0">
-              <a:buNone/>
-            </a:pPr>
-            <a:r>
-              <a:rPr lang="en-US" sz="2800" b="1" dirty="0">
-                <a:solidFill>
-                  <a:srgbClr val="0E1C42"/>
-                </a:solidFill>
-                <a:latin typeface="Calibri" pitchFamily="34" charset="0"/>
-                <a:ea typeface="Calibri" pitchFamily="34" charset="-122"/>
-                <a:cs typeface="Calibri" pitchFamily="34" charset="-120"/>
-              </a:rPr>
-              <a:t>💡 Today's Focus</a:t>
-            </a:r>
-            <a:endParaRPr lang="en-US" sz="2800" dirty="0"/>
-          </a:p>
-        </p:txBody>
-      </p:sp>
-      <p:sp>
-        <p:nvSpPr>
-          <p:cNvPr id="3" name="Shape 1"/>
-          <p:cNvSpPr/>
-          <p:nvPr/>
-        </p:nvSpPr>
-        <p:spPr>
-          <a:xfrm>
-            <a:off x="365760" y="749808"/>
-            <a:ext cx="8412480" cy="0"/>
-          </a:xfrm>
-          <a:prstGeom prst="line">
-            <a:avLst/>
-          </a:prstGeom>
-          <a:noFill/>
-          <a:ln w="19050">
-            <a:solidFill>
-              <a:srgbClr val="4A90D9"/>
-            </a:solidFill>
-            <a:prstDash val="solid"/>
-          </a:ln>
-        </p:spPr>
-      </p:sp>
-      <p:sp>
-        <p:nvSpPr>
-          <p:cNvPr id="4" name="Shape 2"/>
-          <p:cNvSpPr/>
-          <p:nvPr/>
-        </p:nvSpPr>
-        <p:spPr>
-          <a:xfrm>
-            <a:off x="6492240" y="173736"/>
-            <a:ext cx="2286000" cy="502920"/>
-          </a:xfrm>
-          <a:prstGeom prst="roundRect">
-            <a:avLst>
-              <a:gd name="adj" fmla="val 21818"/>
-            </a:avLst>
+          <p:cNvPr id="2" name="Shape 0"/>
+          <p:cNvSpPr/>
+          <p:nvPr/>
+        </p:nvSpPr>
+        <p:spPr>
+          <a:xfrm>
+            <a:off x="0" y="0"/>
+            <a:ext cx="9144000" cy="566928"/>
+          </a:xfrm>
+          <a:prstGeom prst="rect">
+            <a:avLst/>
           </a:prstGeom>
           <a:solidFill>
             <a:srgbClr val="4A90D9"/>
@@ -4465,14 +3402,92 @@
       </p:sp>
       <p:sp>
         <p:nvSpPr>
+          <p:cNvPr id="3" name="Text 1"/>
+          <p:cNvSpPr/>
+          <p:nvPr/>
+        </p:nvSpPr>
+        <p:spPr>
+          <a:xfrm>
+            <a:off x="365760" y="54864"/>
+            <a:ext cx="8412480" cy="457200"/>
+          </a:xfrm>
+          <a:prstGeom prst="rect">
+            <a:avLst/>
+          </a:prstGeom>
+          <a:noFill/>
+          <a:ln/>
+        </p:spPr>
+        <p:txBody>
+          <a:bodyPr wrap="square" lIns="0" tIns="0" rIns="0" bIns="0" rtlCol="0" anchor="ctr"/>
+          <a:lstStyle/>
+          <a:p>
+            <a:pPr indent="0" marL="0">
+              <a:buNone/>
+            </a:pPr>
+            <a:r>
+              <a:rPr lang="en-US" sz="2200" b="1" dirty="0">
+                <a:solidFill>
+                  <a:srgbClr val="FFFFFF"/>
+                </a:solidFill>
+                <a:latin typeface="Calibri" pitchFamily="34" charset="0"/>
+                <a:ea typeface="Calibri" pitchFamily="34" charset="-122"/>
+                <a:cs typeface="Calibri" pitchFamily="34" charset="-120"/>
+              </a:rPr>
+              <a:t>📖  Today</a:t>
+            </a:r>
+            <a:endParaRPr lang="en-US" sz="2200" dirty="0"/>
+          </a:p>
+        </p:txBody>
+      </p:sp>
+      <p:sp>
+        <p:nvSpPr>
+          <p:cNvPr id="4" name="Text 2"/>
+          <p:cNvSpPr/>
+          <p:nvPr/>
+        </p:nvSpPr>
+        <p:spPr>
+          <a:xfrm>
+            <a:off x="365760" y="777240"/>
+            <a:ext cx="8229600" cy="237744"/>
+          </a:xfrm>
+          <a:prstGeom prst="rect">
+            <a:avLst/>
+          </a:prstGeom>
+          <a:noFill/>
+          <a:ln/>
+        </p:spPr>
+        <p:txBody>
+          <a:bodyPr wrap="square" lIns="0" tIns="0" rIns="0" bIns="0" rtlCol="0" anchor="ctr"/>
+          <a:lstStyle/>
+          <a:p>
+            <a:pPr indent="0" marL="0">
+              <a:buNone/>
+            </a:pPr>
+            <a:r>
+              <a:rPr lang="en-US" sz="1100" b="1" spc="100" kern="0" dirty="0">
+                <a:solidFill>
+                  <a:srgbClr val="8B6FC0"/>
+                </a:solidFill>
+                <a:latin typeface="Calibri" pitchFamily="34" charset="0"/>
+                <a:ea typeface="Calibri" pitchFamily="34" charset="-122"/>
+                <a:cs typeface="Calibri" pitchFamily="34" charset="-120"/>
+              </a:rPr>
+              <a:t>READING</a:t>
+            </a:r>
+            <a:endParaRPr lang="en-US" sz="1100" dirty="0"/>
+          </a:p>
+        </p:txBody>
+      </p:sp>
+      <p:sp>
+        <p:nvSpPr>
           <p:cNvPr id="5" name="Text 3"/>
           <p:cNvSpPr/>
           <p:nvPr/>
         </p:nvSpPr>
         <p:spPr>
           <a:xfrm>
-            <a:off x="6492240" y="173736"/>
-            <a:ext cx="2286000" cy="502920"/>
+            <a:off x="365760" y="1014984"/>
+            <a:ext cx="8412480" cy="365760"/>
           </a:xfrm>
           <a:prstGeom prst="rect">
             <a:avLst/>
@@ -4484,11 +3499,11 @@
           <a:bodyPr wrap="square" lIns="0" tIns="0" rIns="0" bIns="0" rtlCol="0" anchor="ctr"/>
           <a:lstStyle/>
           <a:p>
-            <a:pPr algn="ctr" indent="0" marL="0">
-              <a:buNone/>
-            </a:pPr>
-            <a:r>
-              <a:rPr lang="en-US" sz="1100" b="1" dirty="0">
+            <a:pPr indent="0" marL="0">
+              <a:buNone/>
+            </a:pPr>
+            <a:r>
+              <a:rPr lang="en-US" sz="2000" b="1" dirty="0">
                 <a:solidFill>
                   <a:srgbClr val="0E1C42"/>
                 </a:solidFill>
@@ -4496,7 +3511,46 @@
                 <a:ea typeface="Calibri" pitchFamily="34" charset="-122"/>
                 <a:cs typeface="Calibri" pitchFamily="34" charset="-120"/>
               </a:rPr>
-              <a:t>CHAT PROMPT</a:t>
+              <a:t>Reading: Ch. 1–3</a:t>
+            </a:r>
+            <a:endParaRPr lang="en-US" sz="2000" dirty="0"/>
+          </a:p>
+        </p:txBody>
+      </p:sp>
+      <p:sp>
+        <p:nvSpPr>
+          <p:cNvPr id="6" name="Text 4"/>
+          <p:cNvSpPr/>
+          <p:nvPr/>
+        </p:nvSpPr>
+        <p:spPr>
+          <a:xfrm>
+            <a:off x="365760" y="1508760"/>
+            <a:ext cx="8229600" cy="237744"/>
+          </a:xfrm>
+          <a:prstGeom prst="rect">
+            <a:avLst/>
+          </a:prstGeom>
+          <a:noFill/>
+          <a:ln/>
+        </p:spPr>
+        <p:txBody>
+          <a:bodyPr wrap="square" lIns="0" tIns="0" rIns="0" bIns="0" rtlCol="0" anchor="ctr"/>
+          <a:lstStyle/>
+          <a:p>
+            <a:pPr indent="0" marL="0">
+              <a:buNone/>
+            </a:pPr>
+            <a:r>
+              <a:rPr lang="en-US" sz="1100" b="1" spc="100" kern="0" dirty="0">
+                <a:solidFill>
+                  <a:srgbClr val="C7922C"/>
+                </a:solidFill>
+                <a:latin typeface="Calibri" pitchFamily="34" charset="0"/>
+                <a:ea typeface="Calibri" pitchFamily="34" charset="-122"/>
+                <a:cs typeface="Calibri" pitchFamily="34" charset="-120"/>
+              </a:rPr>
+              <a:t>BIG QUESTION</a:t>
             </a:r>
             <a:endParaRPr lang="en-US" sz="1100" dirty="0"/>
           </a:p>
@@ -4504,63 +3558,24 @@
       </p:sp>
       <p:sp>
         <p:nvSpPr>
-          <p:cNvPr id="6" name="Text 4"/>
-          <p:cNvSpPr/>
-          <p:nvPr/>
-        </p:nvSpPr>
-        <p:spPr>
-          <a:xfrm>
-            <a:off x="457200" y="914400"/>
-            <a:ext cx="8046720" cy="292608"/>
-          </a:xfrm>
-          <a:prstGeom prst="rect">
-            <a:avLst/>
-          </a:prstGeom>
-          <a:noFill/>
-          <a:ln/>
-        </p:spPr>
-        <p:txBody>
-          <a:bodyPr wrap="square" lIns="0" tIns="0" rIns="0" bIns="0" rtlCol="0" anchor="ctr"/>
-          <a:lstStyle/>
-          <a:p>
-            <a:pPr indent="0" marL="0">
-              <a:buNone/>
-            </a:pPr>
-            <a:r>
-              <a:rPr lang="en-US" sz="1100" b="1" spc="200" kern="0" dirty="0">
-                <a:solidFill>
-                  <a:srgbClr val="C7922C"/>
-                </a:solidFill>
-                <a:latin typeface="Calibri" pitchFamily="34" charset="0"/>
-                <a:ea typeface="Calibri" pitchFamily="34" charset="-122"/>
-                <a:cs typeface="Calibri" pitchFamily="34" charset="-120"/>
-              </a:rPr>
-              <a:t>BIG QUESTION</a:t>
-            </a:r>
-            <a:endParaRPr lang="en-US" sz="1100" dirty="0"/>
-          </a:p>
-        </p:txBody>
-      </p:sp>
-      <p:sp>
-        <p:nvSpPr>
           <p:cNvPr id="7" name="Shape 5"/>
           <p:cNvSpPr/>
           <p:nvPr/>
         </p:nvSpPr>
         <p:spPr>
           <a:xfrm>
-            <a:off x="457200" y="1234440"/>
-            <a:ext cx="8229600" cy="640080"/>
+            <a:off x="365760" y="1746504"/>
+            <a:ext cx="8412480" cy="731520"/>
           </a:xfrm>
           <a:prstGeom prst="roundRect">
             <a:avLst>
-              <a:gd name="adj" fmla="val 14286"/>
+              <a:gd name="adj" fmla="val 12500"/>
             </a:avLst>
           </a:prstGeom>
           <a:solidFill>
             <a:srgbClr val="FEF6E8"/>
           </a:solidFill>
-          <a:ln w="12700">
+          <a:ln w="19050">
             <a:solidFill>
               <a:srgbClr val="C7922C"/>
             </a:solidFill>
@@ -4583,8 +3598,8 @@
         </p:nvSpPr>
         <p:spPr>
           <a:xfrm>
-            <a:off x="640080" y="1344168"/>
-            <a:ext cx="7863840" cy="411480"/>
+            <a:off x="594360" y="1874520"/>
+            <a:ext cx="7955280" cy="475488"/>
           </a:xfrm>
           <a:prstGeom prst="rect">
             <a:avLst/>
@@ -4600,7 +3615,7 @@
               <a:buNone/>
             </a:pPr>
             <a:r>
-              <a:rPr lang="en-US" sz="1800" i="1" dirty="0">
+              <a:rPr lang="en-US" sz="1700" dirty="0">
                 <a:solidFill>
                   <a:srgbClr val="1E293B"/>
                 </a:solidFill>
@@ -4610,43 +3625,48 @@
               </a:rPr>
               <a:t>Orient yourself in fantasy settings.</a:t>
             </a:r>
-            <a:endParaRPr lang="en-US" sz="1800" dirty="0"/>
-          </a:p>
-        </p:txBody>
-      </p:sp>
-      <p:sp>
-        <p:nvSpPr>
-          <p:cNvPr id="9" name="Shape 7"/>
-          <p:cNvSpPr/>
-          <p:nvPr/>
-        </p:nvSpPr>
-        <p:spPr>
-          <a:xfrm>
-            <a:off x="457200" y="1965960"/>
-            <a:ext cx="8229600" cy="640080"/>
-          </a:xfrm>
-          <a:prstGeom prst="roundRect">
-            <a:avLst>
-              <a:gd name="adj" fmla="val 14286"/>
-            </a:avLst>
-          </a:prstGeom>
-          <a:solidFill>
-            <a:srgbClr val="FEF6E8"/>
-          </a:solidFill>
-          <a:ln w="12700">
-            <a:solidFill>
-              <a:srgbClr val="C7922C"/>
-            </a:solidFill>
-            <a:prstDash val="solid"/>
-          </a:ln>
-          <a:effectLst>
-            <a:outerShdw sx="100000" sy="100000" kx="0" ky="0" algn="bl" rotWithShape="0" blurRad="101600" dist="38100" dir="2700000">
-              <a:srgbClr val="000000">
-                <a:alpha val="12000"/>
-              </a:srgbClr>
-            </a:outerShdw>
-          </a:effectLst>
-        </p:spPr>
+            <a:endParaRPr lang="en-US" sz="1700" dirty="0"/>
+          </a:p>
+        </p:txBody>
+      </p:sp>
+      <p:sp>
+        <p:nvSpPr>
+          <p:cNvPr id="9" name="Text 7"/>
+          <p:cNvSpPr/>
+          <p:nvPr/>
+        </p:nvSpPr>
+        <p:spPr>
+          <a:xfrm>
+            <a:off x="365760" y="2606040"/>
+            <a:ext cx="8229600" cy="237744"/>
+          </a:xfrm>
+          <a:prstGeom prst="rect">
+            <a:avLst/>
+          </a:prstGeom>
+          <a:noFill/>
+          <a:ln/>
+        </p:spPr>
+        <p:txBody>
+          <a:bodyPr wrap="square" lIns="0" tIns="0" rIns="0" bIns="0" rtlCol="0" anchor="ctr"/>
+          <a:lstStyle/>
+          <a:p>
+            <a:pPr indent="0" marL="0">
+              <a:buNone/>
+            </a:pPr>
+            <a:r>
+              <a:rPr lang="en-US" sz="1100" b="1" spc="100" kern="0" dirty="0">
+                <a:solidFill>
+                  <a:srgbClr val="55C8E8"/>
+                </a:solidFill>
+                <a:latin typeface="Calibri" pitchFamily="34" charset="0"/>
+                <a:ea typeface="Calibri" pitchFamily="34" charset="-122"/>
+                <a:cs typeface="Calibri" pitchFamily="34" charset="-120"/>
+              </a:rPr>
+              <a:t>READING LENS</a:t>
+            </a:r>
+            <a:endParaRPr lang="en-US" sz="1100" dirty="0"/>
+          </a:p>
+        </p:txBody>
       </p:sp>
       <p:sp>
         <p:nvSpPr>
@@ -4656,159 +3676,8 @@
         </p:nvSpPr>
         <p:spPr>
           <a:xfrm>
-            <a:off x="640080" y="2075688"/>
-            <a:ext cx="7863840" cy="411480"/>
-          </a:xfrm>
-          <a:prstGeom prst="rect">
-            <a:avLst/>
-          </a:prstGeom>
-          <a:noFill/>
-          <a:ln/>
-        </p:spPr>
-        <p:txBody>
-          <a:bodyPr wrap="square" lIns="0" tIns="0" rIns="0" bIns="0" rtlCol="0" anchor="ctr"/>
-          <a:lstStyle/>
-          <a:p>
-            <a:pPr indent="0" marL="0">
-              <a:buNone/>
-            </a:pPr>
-            <a:r>
-              <a:rPr lang="en-US" sz="1800" i="1" dirty="0">
-                <a:solidFill>
-                  <a:srgbClr val="1E293B"/>
-                </a:solidFill>
-                <a:latin typeface="Calibri" pitchFamily="34" charset="0"/>
-                <a:ea typeface="Calibri" pitchFamily="34" charset="-122"/>
-                <a:cs typeface="Calibri" pitchFamily="34" charset="-120"/>
-              </a:rPr>
-              <a:t>As you read today, ask yourself: What makes a reader believe in a fantasy world an author has invented?</a:t>
-            </a:r>
-            <a:endParaRPr lang="en-US" sz="1800" dirty="0"/>
-          </a:p>
-        </p:txBody>
-      </p:sp>
-      <p:sp>
-        <p:nvSpPr>
-          <p:cNvPr id="11" name="Shape 9"/>
-          <p:cNvSpPr/>
-          <p:nvPr/>
-        </p:nvSpPr>
-        <p:spPr>
-          <a:xfrm>
-            <a:off x="457200" y="2697480"/>
-            <a:ext cx="8229600" cy="640080"/>
-          </a:xfrm>
-          <a:prstGeom prst="roundRect">
-            <a:avLst>
-              <a:gd name="adj" fmla="val 14286"/>
-            </a:avLst>
-          </a:prstGeom>
-          <a:solidFill>
-            <a:srgbClr val="FEF6E8"/>
-          </a:solidFill>
-          <a:ln w="12700">
-            <a:solidFill>
-              <a:srgbClr val="C7922C"/>
-            </a:solidFill>
-            <a:prstDash val="solid"/>
-          </a:ln>
-          <a:effectLst>
-            <a:outerShdw sx="100000" sy="100000" kx="0" ky="0" algn="bl" rotWithShape="0" blurRad="101600" dist="38100" dir="2700000">
-              <a:srgbClr val="000000">
-                <a:alpha val="12000"/>
-              </a:srgbClr>
-            </a:outerShdw>
-          </a:effectLst>
-        </p:spPr>
-      </p:sp>
-      <p:sp>
-        <p:nvSpPr>
-          <p:cNvPr id="12" name="Text 10"/>
-          <p:cNvSpPr/>
-          <p:nvPr/>
-        </p:nvSpPr>
-        <p:spPr>
-          <a:xfrm>
-            <a:off x="640080" y="2807208"/>
-            <a:ext cx="7863840" cy="411480"/>
-          </a:xfrm>
-          <a:prstGeom prst="rect">
-            <a:avLst/>
-          </a:prstGeom>
-          <a:noFill/>
-          <a:ln/>
-        </p:spPr>
-        <p:txBody>
-          <a:bodyPr wrap="square" lIns="0" tIns="0" rIns="0" bIns="0" rtlCol="0" anchor="ctr"/>
-          <a:lstStyle/>
-          <a:p>
-            <a:pPr indent="0" marL="0">
-              <a:buNone/>
-            </a:pPr>
-            <a:r>
-              <a:rPr lang="en-US" sz="1800" i="1" dirty="0">
-                <a:solidFill>
-                  <a:srgbClr val="1E293B"/>
-                </a:solidFill>
-                <a:latin typeface="Calibri" pitchFamily="34" charset="0"/>
-                <a:ea typeface="Calibri" pitchFamily="34" charset="-122"/>
-                <a:cs typeface="Calibri" pitchFamily="34" charset="-120"/>
-              </a:rPr>
-              <a:t>Complete this sentence: C.S. Lewis makes Narnia feel real by ___. Include at least one detail from the book.</a:t>
-            </a:r>
-            <a:endParaRPr lang="en-US" sz="1800" dirty="0"/>
-          </a:p>
-        </p:txBody>
-      </p:sp>
-      <p:sp>
-        <p:nvSpPr>
-          <p:cNvPr id="13" name="Text 11"/>
-          <p:cNvSpPr/>
-          <p:nvPr/>
-        </p:nvSpPr>
-        <p:spPr>
-          <a:xfrm>
-            <a:off x="457200" y="3429000"/>
-            <a:ext cx="8046720" cy="292608"/>
-          </a:xfrm>
-          <a:prstGeom prst="rect">
-            <a:avLst/>
-          </a:prstGeom>
-          <a:noFill/>
-          <a:ln/>
-        </p:spPr>
-        <p:txBody>
-          <a:bodyPr wrap="square" lIns="0" tIns="0" rIns="0" bIns="0" rtlCol="0" anchor="ctr"/>
-          <a:lstStyle/>
-          <a:p>
-            <a:pPr indent="0" marL="0">
-              <a:buNone/>
-            </a:pPr>
-            <a:r>
-              <a:rPr lang="en-US" sz="1100" b="1" spc="200" kern="0" dirty="0">
-                <a:solidFill>
-                  <a:srgbClr val="8B6FC0"/>
-                </a:solidFill>
-                <a:latin typeface="Calibri" pitchFamily="34" charset="0"/>
-                <a:ea typeface="Calibri" pitchFamily="34" charset="-122"/>
-                <a:cs typeface="Calibri" pitchFamily="34" charset="-120"/>
-              </a:rPr>
-              <a:t>READING LENS</a:t>
-            </a:r>
-            <a:endParaRPr lang="en-US" sz="1100" dirty="0"/>
-          </a:p>
-        </p:txBody>
-      </p:sp>
-      <p:sp>
-        <p:nvSpPr>
-          <p:cNvPr id="14" name="Text 12"/>
-          <p:cNvSpPr/>
-          <p:nvPr/>
-        </p:nvSpPr>
-        <p:spPr>
-          <a:xfrm>
-            <a:off x="640080" y="3749040"/>
-            <a:ext cx="7863840" cy="731520"/>
+            <a:off x="365760" y="2843784"/>
+            <a:ext cx="8412480" cy="914400"/>
           </a:xfrm>
           <a:prstGeom prst="rect">
             <a:avLst/>
@@ -4872,14 +3741,34 @@
       </p:grpSpPr>
       <p:sp>
         <p:nvSpPr>
-          <p:cNvPr id="2" name="Text 0"/>
-          <p:cNvSpPr/>
-          <p:nvPr/>
-        </p:nvSpPr>
-        <p:spPr>
-          <a:xfrm>
-            <a:off x="365760" y="164592"/>
-            <a:ext cx="8412480" cy="566928"/>
+          <p:cNvPr id="2" name="Shape 0"/>
+          <p:cNvSpPr/>
+          <p:nvPr/>
+        </p:nvSpPr>
+        <p:spPr>
+          <a:xfrm>
+            <a:off x="0" y="0"/>
+            <a:ext cx="9144000" cy="566928"/>
+          </a:xfrm>
+          <a:prstGeom prst="rect">
+            <a:avLst/>
+          </a:prstGeom>
+          <a:solidFill>
+            <a:srgbClr val="55C8E8"/>
+          </a:solidFill>
+          <a:ln/>
+        </p:spPr>
+      </p:sp>
+      <p:sp>
+        <p:nvSpPr>
+          <p:cNvPr id="3" name="Text 1"/>
+          <p:cNvSpPr/>
+          <p:nvPr/>
+        </p:nvSpPr>
+        <p:spPr>
+          <a:xfrm>
+            <a:off x="365760" y="54864"/>
+            <a:ext cx="8412480" cy="457200"/>
           </a:xfrm>
           <a:prstGeom prst="rect">
             <a:avLst/>
@@ -4891,72 +3780,83 @@
           <a:bodyPr wrap="square" lIns="0" tIns="0" rIns="0" bIns="0" rtlCol="0" anchor="ctr"/>
           <a:lstStyle/>
           <a:p>
-            <a:pPr algn="l" indent="0" marL="0">
-              <a:buNone/>
-            </a:pPr>
-            <a:r>
-              <a:rPr lang="en-US" sz="2800" b="1" dirty="0">
-                <a:solidFill>
-                  <a:srgbClr val="0E1C42"/>
-                </a:solidFill>
-                <a:latin typeface="Calibri" pitchFamily="34" charset="0"/>
-                <a:ea typeface="Calibri" pitchFamily="34" charset="-122"/>
-                <a:cs typeface="Calibri" pitchFamily="34" charset="-120"/>
-              </a:rPr>
-              <a:t>✅ Model Sentence — Study What's Right</a:t>
-            </a:r>
-            <a:endParaRPr lang="en-US" sz="2800" dirty="0"/>
-          </a:p>
-        </p:txBody>
-      </p:sp>
-      <p:sp>
-        <p:nvSpPr>
-          <p:cNvPr id="3" name="Shape 1"/>
-          <p:cNvSpPr/>
-          <p:nvPr/>
-        </p:nvSpPr>
-        <p:spPr>
-          <a:xfrm>
-            <a:off x="365760" y="749808"/>
-            <a:ext cx="8412480" cy="0"/>
-          </a:xfrm>
-          <a:prstGeom prst="line">
-            <a:avLst/>
-          </a:prstGeom>
-          <a:noFill/>
-          <a:ln w="19050">
-            <a:solidFill>
-              <a:srgbClr val="34B76F"/>
-            </a:solidFill>
-            <a:prstDash val="solid"/>
-          </a:ln>
-        </p:spPr>
-      </p:sp>
-      <p:sp>
-        <p:nvSpPr>
-          <p:cNvPr id="4" name="Shape 2"/>
-          <p:cNvSpPr/>
-          <p:nvPr/>
-        </p:nvSpPr>
-        <p:spPr>
-          <a:xfrm>
-            <a:off x="457200" y="1097280"/>
-            <a:ext cx="8229600" cy="914400"/>
+            <a:pPr indent="0" marL="0">
+              <a:buNone/>
+            </a:pPr>
+            <a:r>
+              <a:rPr lang="en-US" sz="2200" b="1" dirty="0">
+                <a:solidFill>
+                  <a:srgbClr val="FFFFFF"/>
+                </a:solidFill>
+                <a:latin typeface="Calibri" pitchFamily="34" charset="0"/>
+                <a:ea typeface="Calibri" pitchFamily="34" charset="-122"/>
+                <a:cs typeface="Calibri" pitchFamily="34" charset="-120"/>
+              </a:rPr>
+              <a:t>✏️  Daily Oral Language</a:t>
+            </a:r>
+            <a:endParaRPr lang="en-US" sz="2200" dirty="0"/>
+          </a:p>
+        </p:txBody>
+      </p:sp>
+      <p:sp>
+        <p:nvSpPr>
+          <p:cNvPr id="4" name="Text 2"/>
+          <p:cNvSpPr/>
+          <p:nvPr/>
+        </p:nvSpPr>
+        <p:spPr>
+          <a:xfrm>
+            <a:off x="365760" y="804672"/>
+            <a:ext cx="8229600" cy="237744"/>
+          </a:xfrm>
+          <a:prstGeom prst="rect">
+            <a:avLst/>
+          </a:prstGeom>
+          <a:noFill/>
+          <a:ln/>
+        </p:spPr>
+        <p:txBody>
+          <a:bodyPr wrap="square" lIns="0" tIns="0" rIns="0" bIns="0" rtlCol="0" anchor="ctr"/>
+          <a:lstStyle/>
+          <a:p>
+            <a:pPr indent="0" marL="0">
+              <a:buNone/>
+            </a:pPr>
+            <a:r>
+              <a:rPr lang="en-US" sz="1100" b="1" spc="100" kern="0" dirty="0">
+                <a:solidFill>
+                  <a:srgbClr val="55C8E8"/>
+                </a:solidFill>
+                <a:latin typeface="Calibri" pitchFamily="34" charset="0"/>
+                <a:ea typeface="Calibri" pitchFamily="34" charset="-122"/>
+                <a:cs typeface="Calibri" pitchFamily="34" charset="-120"/>
+              </a:rPr>
+              <a:t>KEY GRAMMAR POINTS IN THE MODEL</a:t>
+            </a:r>
+            <a:endParaRPr lang="en-US" sz="1100" dirty="0"/>
+          </a:p>
+        </p:txBody>
+      </p:sp>
+      <p:sp>
+        <p:nvSpPr>
+          <p:cNvPr id="5" name="Shape 3"/>
+          <p:cNvSpPr/>
+          <p:nvPr/>
+        </p:nvSpPr>
+        <p:spPr>
+          <a:xfrm>
+            <a:off x="365760" y="1097280"/>
+            <a:ext cx="8412480" cy="548640"/>
           </a:xfrm>
           <a:prstGeom prst="roundRect">
             <a:avLst>
-              <a:gd name="adj" fmla="val 10000"/>
+              <a:gd name="adj" fmla="val 16667"/>
             </a:avLst>
           </a:prstGeom>
           <a:solidFill>
-            <a:srgbClr val="E8F8EF"/>
+            <a:srgbClr val="F8FAFC"/>
           </a:solidFill>
-          <a:ln w="12700">
-            <a:solidFill>
-              <a:srgbClr val="34B76F"/>
-            </a:solidFill>
-            <a:prstDash val="solid"/>
-          </a:ln>
+          <a:ln/>
           <a:effectLst>
             <a:outerShdw sx="100000" sy="100000" kx="0" ky="0" algn="bl" rotWithShape="0" blurRad="101600" dist="38100" dir="2700000">
               <a:srgbClr val="000000">
@@ -4968,14 +3868,14 @@
       </p:sp>
       <p:sp>
         <p:nvSpPr>
-          <p:cNvPr id="5" name="Text 3"/>
-          <p:cNvSpPr/>
-          <p:nvPr/>
-        </p:nvSpPr>
-        <p:spPr>
-          <a:xfrm>
-            <a:off x="640080" y="1207008"/>
-            <a:ext cx="7863840" cy="685800"/>
+          <p:cNvPr id="6" name="Text 4"/>
+          <p:cNvSpPr/>
+          <p:nvPr/>
+        </p:nvSpPr>
+        <p:spPr>
+          <a:xfrm>
+            <a:off x="594360" y="1188720"/>
+            <a:ext cx="7863840" cy="365760"/>
           </a:xfrm>
           <a:prstGeom prst="rect">
             <a:avLst/>
@@ -4991,7 +3891,21 @@
               <a:buNone/>
             </a:pPr>
             <a:r>
-              <a:rPr lang="en-US" sz="1800" i="1" dirty="0">
+              <a:rPr lang="en-US" sz="1500" b="1" dirty="0">
+                <a:solidFill>
+                  <a:srgbClr val="0E1C42"/>
+                </a:solidFill>
+                <a:latin typeface="Calibri" pitchFamily="34" charset="0"/>
+                <a:ea typeface="Calibri" pitchFamily="34" charset="-122"/>
+                <a:cs typeface="Calibri" pitchFamily="34" charset="-120"/>
+              </a:rPr>
+              <a:t>Because  </a:t>
+            </a:r>
+            <a:pPr indent="0" marL="0">
+              <a:buNone/>
+            </a:pPr>
+            <a:r>
+              <a:rPr lang="en-US" sz="1300" dirty="0">
                 <a:solidFill>
                   <a:srgbClr val="1E293B"/>
                 </a:solidFill>
@@ -4999,9 +3913,255 @@
                 <a:ea typeface="Calibri" pitchFamily="34" charset="-122"/>
                 <a:cs typeface="Calibri" pitchFamily="34" charset="-120"/>
               </a:rPr>
-              <a:t>Because Mr Tumnus Witch, Lucy.</a:t>
-            </a:r>
-            <a:endParaRPr lang="en-US" sz="1800" dirty="0"/>
+              <a:t>Connecting word — begins the dependent clause.</a:t>
+            </a:r>
+            <a:endParaRPr lang="en-US" sz="1500" dirty="0"/>
+          </a:p>
+        </p:txBody>
+      </p:sp>
+      <p:sp>
+        <p:nvSpPr>
+          <p:cNvPr id="7" name="Shape 5"/>
+          <p:cNvSpPr/>
+          <p:nvPr/>
+        </p:nvSpPr>
+        <p:spPr>
+          <a:xfrm>
+            <a:off x="365760" y="1719072"/>
+            <a:ext cx="8412480" cy="548640"/>
+          </a:xfrm>
+          <a:prstGeom prst="roundRect">
+            <a:avLst>
+              <a:gd name="adj" fmla="val 16667"/>
+            </a:avLst>
+          </a:prstGeom>
+          <a:solidFill>
+            <a:srgbClr val="FFFFFF"/>
+          </a:solidFill>
+          <a:ln/>
+          <a:effectLst>
+            <a:outerShdw sx="100000" sy="100000" kx="0" ky="0" algn="bl" rotWithShape="0" blurRad="101600" dist="38100" dir="2700000">
+              <a:srgbClr val="000000">
+                <a:alpha val="12000"/>
+              </a:srgbClr>
+            </a:outerShdw>
+          </a:effectLst>
+        </p:spPr>
+      </p:sp>
+      <p:sp>
+        <p:nvSpPr>
+          <p:cNvPr id="8" name="Text 6"/>
+          <p:cNvSpPr/>
+          <p:nvPr/>
+        </p:nvSpPr>
+        <p:spPr>
+          <a:xfrm>
+            <a:off x="594360" y="1810512"/>
+            <a:ext cx="7863840" cy="365760"/>
+          </a:xfrm>
+          <a:prstGeom prst="rect">
+            <a:avLst/>
+          </a:prstGeom>
+          <a:noFill/>
+          <a:ln/>
+        </p:spPr>
+        <p:txBody>
+          <a:bodyPr wrap="square" lIns="0" tIns="0" rIns="0" bIns="0" rtlCol="0" anchor="ctr"/>
+          <a:lstStyle/>
+          <a:p>
+            <a:pPr indent="0" marL="0">
+              <a:buNone/>
+            </a:pPr>
+            <a:r>
+              <a:rPr lang="en-US" sz="1500" b="1" dirty="0">
+                <a:solidFill>
+                  <a:srgbClr val="0E1C42"/>
+                </a:solidFill>
+                <a:latin typeface="Calibri" pitchFamily="34" charset="0"/>
+                <a:ea typeface="Calibri" pitchFamily="34" charset="-122"/>
+                <a:cs typeface="Calibri" pitchFamily="34" charset="-120"/>
+              </a:rPr>
+              <a:t>Mr  </a:t>
+            </a:r>
+            <a:pPr indent="0" marL="0">
+              <a:buNone/>
+            </a:pPr>
+            <a:r>
+              <a:rPr lang="en-US" sz="1300" dirty="0">
+                <a:solidFill>
+                  <a:srgbClr val="1E293B"/>
+                </a:solidFill>
+                <a:latin typeface="Calibri" pitchFamily="34" charset="0"/>
+                <a:ea typeface="Calibri" pitchFamily="34" charset="-122"/>
+                <a:cs typeface="Calibri" pitchFamily="34" charset="-120"/>
+              </a:rPr>
+              <a:t>Title abbreviation — capital M, period after r.</a:t>
+            </a:r>
+            <a:endParaRPr lang="en-US" sz="1500" dirty="0"/>
+          </a:p>
+        </p:txBody>
+      </p:sp>
+      <p:sp>
+        <p:nvSpPr>
+          <p:cNvPr id="9" name="Shape 7"/>
+          <p:cNvSpPr/>
+          <p:nvPr/>
+        </p:nvSpPr>
+        <p:spPr>
+          <a:xfrm>
+            <a:off x="365760" y="2340864"/>
+            <a:ext cx="8412480" cy="548640"/>
+          </a:xfrm>
+          <a:prstGeom prst="roundRect">
+            <a:avLst>
+              <a:gd name="adj" fmla="val 16667"/>
+            </a:avLst>
+          </a:prstGeom>
+          <a:solidFill>
+            <a:srgbClr val="F8FAFC"/>
+          </a:solidFill>
+          <a:ln/>
+          <a:effectLst>
+            <a:outerShdw sx="100000" sy="100000" kx="0" ky="0" algn="bl" rotWithShape="0" blurRad="101600" dist="38100" dir="2700000">
+              <a:srgbClr val="000000">
+                <a:alpha val="12000"/>
+              </a:srgbClr>
+            </a:outerShdw>
+          </a:effectLst>
+        </p:spPr>
+      </p:sp>
+      <p:sp>
+        <p:nvSpPr>
+          <p:cNvPr id="10" name="Text 8"/>
+          <p:cNvSpPr/>
+          <p:nvPr/>
+        </p:nvSpPr>
+        <p:spPr>
+          <a:xfrm>
+            <a:off x="594360" y="2432304"/>
+            <a:ext cx="7863840" cy="365760"/>
+          </a:xfrm>
+          <a:prstGeom prst="rect">
+            <a:avLst/>
+          </a:prstGeom>
+          <a:noFill/>
+          <a:ln/>
+        </p:spPr>
+        <p:txBody>
+          <a:bodyPr wrap="square" lIns="0" tIns="0" rIns="0" bIns="0" rtlCol="0" anchor="ctr"/>
+          <a:lstStyle/>
+          <a:p>
+            <a:pPr indent="0" marL="0">
+              <a:buNone/>
+            </a:pPr>
+            <a:r>
+              <a:rPr lang="en-US" sz="1500" b="1" dirty="0">
+                <a:solidFill>
+                  <a:srgbClr val="0E1C42"/>
+                </a:solidFill>
+                <a:latin typeface="Calibri" pitchFamily="34" charset="0"/>
+                <a:ea typeface="Calibri" pitchFamily="34" charset="-122"/>
+                <a:cs typeface="Calibri" pitchFamily="34" charset="-120"/>
+              </a:rPr>
+              <a:t>Tumnus  </a:t>
+            </a:r>
+            <a:pPr indent="0" marL="0">
+              <a:buNone/>
+            </a:pPr>
+            <a:r>
+              <a:rPr lang="en-US" sz="1300" dirty="0">
+                <a:solidFill>
+                  <a:srgbClr val="1E293B"/>
+                </a:solidFill>
+                <a:latin typeface="Calibri" pitchFamily="34" charset="0"/>
+                <a:ea typeface="Calibri" pitchFamily="34" charset="-122"/>
+                <a:cs typeface="Calibri" pitchFamily="34" charset="-120"/>
+              </a:rPr>
+              <a:t>Proper noun — capital T.</a:t>
+            </a:r>
+            <a:endParaRPr lang="en-US" sz="1500" dirty="0"/>
+          </a:p>
+        </p:txBody>
+      </p:sp>
+      <p:sp>
+        <p:nvSpPr>
+          <p:cNvPr id="11" name="Shape 9"/>
+          <p:cNvSpPr/>
+          <p:nvPr/>
+        </p:nvSpPr>
+        <p:spPr>
+          <a:xfrm>
+            <a:off x="365760" y="2962656"/>
+            <a:ext cx="8412480" cy="548640"/>
+          </a:xfrm>
+          <a:prstGeom prst="roundRect">
+            <a:avLst>
+              <a:gd name="adj" fmla="val 16667"/>
+            </a:avLst>
+          </a:prstGeom>
+          <a:solidFill>
+            <a:srgbClr val="FFFFFF"/>
+          </a:solidFill>
+          <a:ln/>
+          <a:effectLst>
+            <a:outerShdw sx="100000" sy="100000" kx="0" ky="0" algn="bl" rotWithShape="0" blurRad="101600" dist="38100" dir="2700000">
+              <a:srgbClr val="000000">
+                <a:alpha val="12000"/>
+              </a:srgbClr>
+            </a:outerShdw>
+          </a:effectLst>
+        </p:spPr>
+      </p:sp>
+      <p:sp>
+        <p:nvSpPr>
+          <p:cNvPr id="12" name="Text 10"/>
+          <p:cNvSpPr/>
+          <p:nvPr/>
+        </p:nvSpPr>
+        <p:spPr>
+          <a:xfrm>
+            <a:off x="594360" y="3054096"/>
+            <a:ext cx="7863840" cy="365760"/>
+          </a:xfrm>
+          <a:prstGeom prst="rect">
+            <a:avLst/>
+          </a:prstGeom>
+          <a:noFill/>
+          <a:ln/>
+        </p:spPr>
+        <p:txBody>
+          <a:bodyPr wrap="square" lIns="0" tIns="0" rIns="0" bIns="0" rtlCol="0" anchor="ctr"/>
+          <a:lstStyle/>
+          <a:p>
+            <a:pPr indent="0" marL="0">
+              <a:buNone/>
+            </a:pPr>
+            <a:r>
+              <a:rPr lang="en-US" sz="1500" b="1" dirty="0">
+                <a:solidFill>
+                  <a:srgbClr val="0E1C42"/>
+                </a:solidFill>
+                <a:latin typeface="Calibri" pitchFamily="34" charset="0"/>
+                <a:ea typeface="Calibri" pitchFamily="34" charset="-122"/>
+                <a:cs typeface="Calibri" pitchFamily="34" charset="-120"/>
+              </a:rPr>
+              <a:t>Witch,  </a:t>
+            </a:r>
+            <a:pPr indent="0" marL="0">
+              <a:buNone/>
+            </a:pPr>
+            <a:r>
+              <a:rPr lang="en-US" sz="1300" dirty="0">
+                <a:solidFill>
+                  <a:srgbClr val="1E293B"/>
+                </a:solidFill>
+                <a:latin typeface="Calibri" pitchFamily="34" charset="0"/>
+                <a:ea typeface="Calibri" pitchFamily="34" charset="-122"/>
+                <a:cs typeface="Calibri" pitchFamily="34" charset="-120"/>
+              </a:rPr>
+              <a:t>Proper noun — capital W; comma after the dependent clause.</a:t>
+            </a:r>
+            <a:endParaRPr lang="en-US" sz="1500" dirty="0"/>
           </a:p>
         </p:txBody>
       </p:sp>
@@ -5019,7 +4179,7 @@
     <p:bg>
       <p:bgPr>
         <a:solidFill>
-          <a:srgbClr val="E5F7FC"/>
+          <a:srgbClr val="F8FAFC"/>
         </a:solidFill>
       </p:bgPr>
     </p:bg>
@@ -5039,14 +4199,34 @@
       </p:grpSpPr>
       <p:sp>
         <p:nvSpPr>
-          <p:cNvPr id="2" name="Text 0"/>
-          <p:cNvSpPr/>
-          <p:nvPr/>
-        </p:nvSpPr>
-        <p:spPr>
-          <a:xfrm>
-            <a:off x="365760" y="164592"/>
-            <a:ext cx="5943600" cy="566928"/>
+          <p:cNvPr id="2" name="Shape 0"/>
+          <p:cNvSpPr/>
+          <p:nvPr/>
+        </p:nvSpPr>
+        <p:spPr>
+          <a:xfrm>
+            <a:off x="0" y="0"/>
+            <a:ext cx="9144000" cy="566928"/>
+          </a:xfrm>
+          <a:prstGeom prst="rect">
+            <a:avLst/>
+          </a:prstGeom>
+          <a:solidFill>
+            <a:srgbClr val="55C8E8"/>
+          </a:solidFill>
+          <a:ln/>
+        </p:spPr>
+      </p:sp>
+      <p:sp>
+        <p:nvSpPr>
+          <p:cNvPr id="3" name="Text 1"/>
+          <p:cNvSpPr/>
+          <p:nvPr/>
+        </p:nvSpPr>
+        <p:spPr>
+          <a:xfrm>
+            <a:off x="365760" y="54864"/>
+            <a:ext cx="8412480" cy="457200"/>
           </a:xfrm>
           <a:prstGeom prst="rect">
             <a:avLst/>
@@ -5058,130 +4238,85 @@
           <a:bodyPr wrap="square" lIns="0" tIns="0" rIns="0" bIns="0" rtlCol="0" anchor="ctr"/>
           <a:lstStyle/>
           <a:p>
-            <a:pPr algn="l" indent="0" marL="0">
-              <a:buNone/>
-            </a:pPr>
-            <a:r>
-              <a:rPr lang="en-US" sz="2800" b="1" dirty="0">
-                <a:solidFill>
-                  <a:srgbClr val="0E1C42"/>
-                </a:solidFill>
-                <a:latin typeface="Calibri" pitchFamily="34" charset="0"/>
-                <a:ea typeface="Calibri" pitchFamily="34" charset="-122"/>
-                <a:cs typeface="Calibri" pitchFamily="34" charset="-120"/>
-              </a:rPr>
-              <a:t>🔧 Fix-It Sentence — Now You Try</a:t>
-            </a:r>
-            <a:endParaRPr lang="en-US" sz="2800" dirty="0"/>
-          </a:p>
-        </p:txBody>
-      </p:sp>
-      <p:sp>
-        <p:nvSpPr>
-          <p:cNvPr id="3" name="Shape 1"/>
+            <a:pPr indent="0" marL="0">
+              <a:buNone/>
+            </a:pPr>
+            <a:r>
+              <a:rPr lang="en-US" sz="2200" b="1" dirty="0">
+                <a:solidFill>
+                  <a:srgbClr val="FFFFFF"/>
+                </a:solidFill>
+                <a:latin typeface="Calibri" pitchFamily="34" charset="0"/>
+                <a:ea typeface="Calibri" pitchFamily="34" charset="-122"/>
+                <a:cs typeface="Calibri" pitchFamily="34" charset="-120"/>
+              </a:rPr>
+              <a:t>✏️  Daily Oral Language</a:t>
+            </a:r>
+            <a:endParaRPr lang="en-US" sz="2200" dirty="0"/>
+          </a:p>
+        </p:txBody>
+      </p:sp>
+      <p:sp>
+        <p:nvSpPr>
+          <p:cNvPr id="4" name="Text 2"/>
           <p:cNvSpPr/>
           <p:nvPr/>
         </p:nvSpPr>
         <p:spPr>
           <a:xfrm>
             <a:off x="365760" y="749808"/>
-            <a:ext cx="8412480" cy="0"/>
-          </a:xfrm>
-          <a:prstGeom prst="line">
-            <a:avLst/>
-          </a:prstGeom>
-          <a:noFill/>
+            <a:ext cx="8229600" cy="237744"/>
+          </a:xfrm>
+          <a:prstGeom prst="rect">
+            <a:avLst/>
+          </a:prstGeom>
+          <a:noFill/>
+          <a:ln/>
+        </p:spPr>
+        <p:txBody>
+          <a:bodyPr wrap="square" lIns="0" tIns="0" rIns="0" bIns="0" rtlCol="0" anchor="ctr"/>
+          <a:lstStyle/>
+          <a:p>
+            <a:pPr indent="0" marL="0">
+              <a:buNone/>
+            </a:pPr>
+            <a:r>
+              <a:rPr lang="en-US" sz="1100" b="1" spc="100" kern="0" dirty="0">
+                <a:solidFill>
+                  <a:srgbClr val="55C8E8"/>
+                </a:solidFill>
+                <a:latin typeface="Calibri" pitchFamily="34" charset="0"/>
+                <a:ea typeface="Calibri" pitchFamily="34" charset="-122"/>
+                <a:cs typeface="Calibri" pitchFamily="34" charset="-120"/>
+              </a:rPr>
+              <a:t>NOW FIX THIS ONE</a:t>
+            </a:r>
+            <a:endParaRPr lang="en-US" sz="1100" dirty="0"/>
+          </a:p>
+        </p:txBody>
+      </p:sp>
+      <p:sp>
+        <p:nvSpPr>
+          <p:cNvPr id="5" name="Shape 3"/>
+          <p:cNvSpPr/>
+          <p:nvPr/>
+        </p:nvSpPr>
+        <p:spPr>
+          <a:xfrm>
+            <a:off x="365760" y="1024128"/>
+            <a:ext cx="8412480" cy="777240"/>
+          </a:xfrm>
+          <a:prstGeom prst="roundRect">
+            <a:avLst>
+              <a:gd name="adj" fmla="val 11765"/>
+            </a:avLst>
+          </a:prstGeom>
+          <a:solidFill>
+            <a:srgbClr val="FFFFFF"/>
+          </a:solidFill>
           <a:ln w="19050">
             <a:solidFill>
-              <a:srgbClr val="4A90D9"/>
-            </a:solidFill>
-            <a:prstDash val="solid"/>
-          </a:ln>
-        </p:spPr>
-      </p:sp>
-      <p:sp>
-        <p:nvSpPr>
-          <p:cNvPr id="4" name="Shape 2"/>
-          <p:cNvSpPr/>
-          <p:nvPr/>
-        </p:nvSpPr>
-        <p:spPr>
-          <a:xfrm>
-            <a:off x="6492240" y="173736"/>
-            <a:ext cx="2286000" cy="502920"/>
-          </a:xfrm>
-          <a:prstGeom prst="roundRect">
-            <a:avLst>
-              <a:gd name="adj" fmla="val 21818"/>
-            </a:avLst>
-          </a:prstGeom>
-          <a:solidFill>
-            <a:srgbClr val="4A90D9"/>
-          </a:solidFill>
-          <a:ln/>
-        </p:spPr>
-      </p:sp>
-      <p:sp>
-        <p:nvSpPr>
-          <p:cNvPr id="5" name="Text 3"/>
-          <p:cNvSpPr/>
-          <p:nvPr/>
-        </p:nvSpPr>
-        <p:spPr>
-          <a:xfrm>
-            <a:off x="6492240" y="173736"/>
-            <a:ext cx="2286000" cy="502920"/>
-          </a:xfrm>
-          <a:prstGeom prst="rect">
-            <a:avLst/>
-          </a:prstGeom>
-          <a:noFill/>
-          <a:ln/>
-        </p:spPr>
-        <p:txBody>
-          <a:bodyPr wrap="square" lIns="0" tIns="0" rIns="0" bIns="0" rtlCol="0" anchor="ctr"/>
-          <a:lstStyle/>
-          <a:p>
-            <a:pPr algn="ctr" indent="0" marL="0">
-              <a:buNone/>
-            </a:pPr>
-            <a:r>
-              <a:rPr lang="en-US" sz="1100" b="1" dirty="0">
-                <a:solidFill>
-                  <a:srgbClr val="0E1C42"/>
-                </a:solidFill>
-                <a:latin typeface="Calibri" pitchFamily="34" charset="0"/>
-                <a:ea typeface="Calibri" pitchFamily="34" charset="-122"/>
-                <a:cs typeface="Calibri" pitchFamily="34" charset="-120"/>
-              </a:rPr>
-              <a:t>CHAT PROMPT</a:t>
-            </a:r>
-            <a:endParaRPr lang="en-US" sz="1100" dirty="0"/>
-          </a:p>
-        </p:txBody>
-      </p:sp>
-      <p:sp>
-        <p:nvSpPr>
-          <p:cNvPr id="6" name="Shape 4"/>
-          <p:cNvSpPr/>
-          <p:nvPr/>
-        </p:nvSpPr>
-        <p:spPr>
-          <a:xfrm>
-            <a:off x="457200" y="1005840"/>
-            <a:ext cx="8229600" cy="640080"/>
-          </a:xfrm>
-          <a:prstGeom prst="roundRect">
-            <a:avLst>
-              <a:gd name="adj" fmla="val 14286"/>
-            </a:avLst>
-          </a:prstGeom>
-          <a:solidFill>
-            <a:srgbClr val="F8FAFC"/>
-          </a:solidFill>
-          <a:ln w="12700">
-            <a:solidFill>
-              <a:srgbClr val="C7922C"/>
+              <a:srgbClr val="55C8E8"/>
             </a:solidFill>
             <a:prstDash val="solid"/>
           </a:ln>
@@ -5196,14 +4331,53 @@
       </p:sp>
       <p:sp>
         <p:nvSpPr>
+          <p:cNvPr id="6" name="Text 4"/>
+          <p:cNvSpPr/>
+          <p:nvPr/>
+        </p:nvSpPr>
+        <p:spPr>
+          <a:xfrm>
+            <a:off x="594360" y="1152144"/>
+            <a:ext cx="7955280" cy="521208"/>
+          </a:xfrm>
+          <a:prstGeom prst="rect">
+            <a:avLst/>
+          </a:prstGeom>
+          <a:noFill/>
+          <a:ln/>
+        </p:spPr>
+        <p:txBody>
+          <a:bodyPr wrap="square" lIns="0" tIns="0" rIns="0" bIns="0" rtlCol="0" anchor="ctr"/>
+          <a:lstStyle/>
+          <a:p>
+            <a:pPr indent="0" marL="0">
+              <a:buNone/>
+            </a:pPr>
+            <a:r>
+              <a:rPr lang="en-US" sz="1700" dirty="0">
+                <a:solidFill>
+                  <a:srgbClr val="1E293B"/>
+                </a:solidFill>
+                <a:latin typeface="Calibri" pitchFamily="34" charset="0"/>
+                <a:ea typeface="Calibri" pitchFamily="34" charset="-122"/>
+                <a:cs typeface="Calibri" pitchFamily="34" charset="-120"/>
+              </a:rPr>
+              <a:t>although lucy was frightened she kept walking deeper into the wood because she was curious</a:t>
+            </a:r>
+            <a:endParaRPr lang="en-US" sz="1700" dirty="0"/>
+          </a:p>
+        </p:txBody>
+      </p:sp>
+      <p:sp>
+        <p:nvSpPr>
           <p:cNvPr id="7" name="Text 5"/>
           <p:cNvSpPr/>
           <p:nvPr/>
         </p:nvSpPr>
         <p:spPr>
           <a:xfrm>
-            <a:off x="640080" y="1115568"/>
-            <a:ext cx="7863840" cy="411480"/>
+            <a:off x="365760" y="2788920"/>
+            <a:ext cx="8412480" cy="365760"/>
           </a:xfrm>
           <a:prstGeom prst="rect">
             <a:avLst/>
@@ -5219,17 +4393,17 @@
               <a:buNone/>
             </a:pPr>
             <a:r>
-              <a:rPr lang="en-US" sz="1800" i="1" dirty="0">
-                <a:solidFill>
-                  <a:srgbClr val="1E293B"/>
-                </a:solidFill>
-                <a:latin typeface="Calibri" pitchFamily="34" charset="0"/>
-                <a:ea typeface="Calibri" pitchFamily="34" charset="-122"/>
-                <a:cs typeface="Calibri" pitchFamily="34" charset="-120"/>
-              </a:rPr>
-              <a:t>although lucy was frightened she kept walking deeper into the wood because she was curious</a:t>
-            </a:r>
-            <a:endParaRPr lang="en-US" sz="1800" dirty="0"/>
+              <a:rPr lang="en-US" sz="1600" b="1" dirty="0">
+                <a:solidFill>
+                  <a:srgbClr val="0E1C42"/>
+                </a:solidFill>
+                <a:latin typeface="Calibri" pitchFamily="34" charset="0"/>
+                <a:ea typeface="Calibri" pitchFamily="34" charset="-122"/>
+                <a:cs typeface="Calibri" pitchFamily="34" charset="-120"/>
+              </a:rPr>
+              <a:t>Rewrite the sentence correctly in your notebook.</a:t>
+            </a:r>
+            <a:endParaRPr lang="en-US" sz="1600" dirty="0"/>
           </a:p>
         </p:txBody>
       </p:sp>
@@ -5247,7 +4421,7 @@
     <p:bg>
       <p:bgPr>
         <a:solidFill>
-          <a:srgbClr val="E5F7FC"/>
+          <a:srgbClr val="F8FAFC"/>
         </a:solidFill>
       </p:bgPr>
     </p:bg>
@@ -5267,14 +4441,34 @@
       </p:grpSpPr>
       <p:sp>
         <p:nvSpPr>
-          <p:cNvPr id="2" name="Text 0"/>
-          <p:cNvSpPr/>
-          <p:nvPr/>
-        </p:nvSpPr>
-        <p:spPr>
-          <a:xfrm>
-            <a:off x="365760" y="164592"/>
-            <a:ext cx="5943600" cy="566928"/>
+          <p:cNvPr id="2" name="Shape 0"/>
+          <p:cNvSpPr/>
+          <p:nvPr/>
+        </p:nvSpPr>
+        <p:spPr>
+          <a:xfrm>
+            <a:off x="0" y="0"/>
+            <a:ext cx="9144000" cy="566928"/>
+          </a:xfrm>
+          <a:prstGeom prst="rect">
+            <a:avLst/>
+          </a:prstGeom>
+          <a:solidFill>
+            <a:srgbClr val="55C8E8"/>
+          </a:solidFill>
+          <a:ln/>
+        </p:spPr>
+      </p:sp>
+      <p:sp>
+        <p:nvSpPr>
+          <p:cNvPr id="3" name="Text 1"/>
+          <p:cNvSpPr/>
+          <p:nvPr/>
+        </p:nvSpPr>
+        <p:spPr>
+          <a:xfrm>
+            <a:off x="365760" y="54864"/>
+            <a:ext cx="8412480" cy="457200"/>
           </a:xfrm>
           <a:prstGeom prst="rect">
             <a:avLst/>
@@ -5286,130 +4480,85 @@
           <a:bodyPr wrap="square" lIns="0" tIns="0" rIns="0" bIns="0" rtlCol="0" anchor="ctr"/>
           <a:lstStyle/>
           <a:p>
-            <a:pPr algn="l" indent="0" marL="0">
-              <a:buNone/>
-            </a:pPr>
-            <a:r>
-              <a:rPr lang="en-US" sz="2800" b="1" dirty="0">
-                <a:solidFill>
-                  <a:srgbClr val="0E1C42"/>
-                </a:solidFill>
-                <a:latin typeface="Calibri" pitchFamily="34" charset="0"/>
-                <a:ea typeface="Calibri" pitchFamily="34" charset="-122"/>
-                <a:cs typeface="Calibri" pitchFamily="34" charset="-120"/>
-              </a:rPr>
-              <a:t>🔧 Fix-It Sentence — Answer Revealed</a:t>
-            </a:r>
-            <a:endParaRPr lang="en-US" sz="2800" dirty="0"/>
-          </a:p>
-        </p:txBody>
-      </p:sp>
-      <p:sp>
-        <p:nvSpPr>
-          <p:cNvPr id="3" name="Shape 1"/>
+            <a:pPr indent="0" marL="0">
+              <a:buNone/>
+            </a:pPr>
+            <a:r>
+              <a:rPr lang="en-US" sz="2200" b="1" dirty="0">
+                <a:solidFill>
+                  <a:srgbClr val="FFFFFF"/>
+                </a:solidFill>
+                <a:latin typeface="Calibri" pitchFamily="34" charset="0"/>
+                <a:ea typeface="Calibri" pitchFamily="34" charset="-122"/>
+                <a:cs typeface="Calibri" pitchFamily="34" charset="-120"/>
+              </a:rPr>
+              <a:t>✏️  Daily Oral Language</a:t>
+            </a:r>
+            <a:endParaRPr lang="en-US" sz="2200" dirty="0"/>
+          </a:p>
+        </p:txBody>
+      </p:sp>
+      <p:sp>
+        <p:nvSpPr>
+          <p:cNvPr id="4" name="Text 2"/>
           <p:cNvSpPr/>
           <p:nvPr/>
         </p:nvSpPr>
         <p:spPr>
           <a:xfrm>
             <a:off x="365760" y="749808"/>
-            <a:ext cx="8412480" cy="0"/>
-          </a:xfrm>
-          <a:prstGeom prst="line">
-            <a:avLst/>
-          </a:prstGeom>
-          <a:noFill/>
+            <a:ext cx="8229600" cy="237744"/>
+          </a:xfrm>
+          <a:prstGeom prst="rect">
+            <a:avLst/>
+          </a:prstGeom>
+          <a:noFill/>
+          <a:ln/>
+        </p:spPr>
+        <p:txBody>
+          <a:bodyPr wrap="square" lIns="0" tIns="0" rIns="0" bIns="0" rtlCol="0" anchor="ctr"/>
+          <a:lstStyle/>
+          <a:p>
+            <a:pPr indent="0" marL="0">
+              <a:buNone/>
+            </a:pPr>
+            <a:r>
+              <a:rPr lang="en-US" sz="1100" b="1" spc="100" kern="0" dirty="0">
+                <a:solidFill>
+                  <a:srgbClr val="55C8E8"/>
+                </a:solidFill>
+                <a:latin typeface="Calibri" pitchFamily="34" charset="0"/>
+                <a:ea typeface="Calibri" pitchFamily="34" charset="-122"/>
+                <a:cs typeface="Calibri" pitchFamily="34" charset="-120"/>
+              </a:rPr>
+              <a:t>NOW FIX THIS ONE</a:t>
+            </a:r>
+            <a:endParaRPr lang="en-US" sz="1100" dirty="0"/>
+          </a:p>
+        </p:txBody>
+      </p:sp>
+      <p:sp>
+        <p:nvSpPr>
+          <p:cNvPr id="5" name="Shape 3"/>
+          <p:cNvSpPr/>
+          <p:nvPr/>
+        </p:nvSpPr>
+        <p:spPr>
+          <a:xfrm>
+            <a:off x="365760" y="1024128"/>
+            <a:ext cx="8412480" cy="777240"/>
+          </a:xfrm>
+          <a:prstGeom prst="roundRect">
+            <a:avLst>
+              <a:gd name="adj" fmla="val 11765"/>
+            </a:avLst>
+          </a:prstGeom>
+          <a:solidFill>
+            <a:srgbClr val="FFFFFF"/>
+          </a:solidFill>
           <a:ln w="19050">
             <a:solidFill>
-              <a:srgbClr val="4A90D9"/>
-            </a:solidFill>
-            <a:prstDash val="solid"/>
-          </a:ln>
-        </p:spPr>
-      </p:sp>
-      <p:sp>
-        <p:nvSpPr>
-          <p:cNvPr id="4" name="Shape 2"/>
-          <p:cNvSpPr/>
-          <p:nvPr/>
-        </p:nvSpPr>
-        <p:spPr>
-          <a:xfrm>
-            <a:off x="6492240" y="173736"/>
-            <a:ext cx="2286000" cy="502920"/>
-          </a:xfrm>
-          <a:prstGeom prst="roundRect">
-            <a:avLst>
-              <a:gd name="adj" fmla="val 21818"/>
-            </a:avLst>
-          </a:prstGeom>
-          <a:solidFill>
-            <a:srgbClr val="4A90D9"/>
-          </a:solidFill>
-          <a:ln/>
-        </p:spPr>
-      </p:sp>
-      <p:sp>
-        <p:nvSpPr>
-          <p:cNvPr id="5" name="Text 3"/>
-          <p:cNvSpPr/>
-          <p:nvPr/>
-        </p:nvSpPr>
-        <p:spPr>
-          <a:xfrm>
-            <a:off x="6492240" y="173736"/>
-            <a:ext cx="2286000" cy="502920"/>
-          </a:xfrm>
-          <a:prstGeom prst="rect">
-            <a:avLst/>
-          </a:prstGeom>
-          <a:noFill/>
-          <a:ln/>
-        </p:spPr>
-        <p:txBody>
-          <a:bodyPr wrap="square" lIns="0" tIns="0" rIns="0" bIns="0" rtlCol="0" anchor="ctr"/>
-          <a:lstStyle/>
-          <a:p>
-            <a:pPr algn="ctr" indent="0" marL="0">
-              <a:buNone/>
-            </a:pPr>
-            <a:r>
-              <a:rPr lang="en-US" sz="1100" b="1" dirty="0">
-                <a:solidFill>
-                  <a:srgbClr val="0E1C42"/>
-                </a:solidFill>
-                <a:latin typeface="Calibri" pitchFamily="34" charset="0"/>
-                <a:ea typeface="Calibri" pitchFamily="34" charset="-122"/>
-                <a:cs typeface="Calibri" pitchFamily="34" charset="-120"/>
-              </a:rPr>
-              <a:t>CHAT PROMPT</a:t>
-            </a:r>
-            <a:endParaRPr lang="en-US" sz="1100" dirty="0"/>
-          </a:p>
-        </p:txBody>
-      </p:sp>
-      <p:sp>
-        <p:nvSpPr>
-          <p:cNvPr id="6" name="Shape 4"/>
-          <p:cNvSpPr/>
-          <p:nvPr/>
-        </p:nvSpPr>
-        <p:spPr>
-          <a:xfrm>
-            <a:off x="457200" y="1005840"/>
-            <a:ext cx="8229600" cy="640080"/>
-          </a:xfrm>
-          <a:prstGeom prst="roundRect">
-            <a:avLst>
-              <a:gd name="adj" fmla="val 14286"/>
-            </a:avLst>
-          </a:prstGeom>
-          <a:solidFill>
-            <a:srgbClr val="F8FAFC"/>
-          </a:solidFill>
-          <a:ln w="12700">
-            <a:solidFill>
-              <a:srgbClr val="C7922C"/>
+              <a:srgbClr val="55C8E8"/>
             </a:solidFill>
             <a:prstDash val="solid"/>
           </a:ln>
@@ -5424,14 +4573,14 @@
       </p:sp>
       <p:sp>
         <p:nvSpPr>
-          <p:cNvPr id="7" name="Text 5"/>
-          <p:cNvSpPr/>
-          <p:nvPr/>
-        </p:nvSpPr>
-        <p:spPr>
-          <a:xfrm>
-            <a:off x="640080" y="1115568"/>
-            <a:ext cx="7863840" cy="411480"/>
+          <p:cNvPr id="6" name="Text 4"/>
+          <p:cNvSpPr/>
+          <p:nvPr/>
+        </p:nvSpPr>
+        <p:spPr>
+          <a:xfrm>
+            <a:off x="594360" y="1152144"/>
+            <a:ext cx="7955280" cy="521208"/>
           </a:xfrm>
           <a:prstGeom prst="rect">
             <a:avLst/>
@@ -5447,7 +4596,7 @@
               <a:buNone/>
             </a:pPr>
             <a:r>
-              <a:rPr lang="en-US" sz="1800" i="1" dirty="0">
+              <a:rPr lang="en-US" sz="1700" dirty="0">
                 <a:solidFill>
                   <a:srgbClr val="1E293B"/>
                 </a:solidFill>
@@ -5457,9 +4606,38 @@
               </a:rPr>
               <a:t>although lucy was frightened she kept walking deeper into the wood because she was curious</a:t>
             </a:r>
-            <a:endParaRPr lang="en-US" sz="1800" dirty="0"/>
-          </a:p>
-        </p:txBody>
+            <a:endParaRPr lang="en-US" sz="1700" dirty="0"/>
+          </a:p>
+        </p:txBody>
+      </p:sp>
+      <p:sp>
+        <p:nvSpPr>
+          <p:cNvPr id="7" name="Shape 5"/>
+          <p:cNvSpPr/>
+          <p:nvPr/>
+        </p:nvSpPr>
+        <p:spPr>
+          <a:xfrm>
+            <a:off x="365760" y="2743200"/>
+            <a:ext cx="8412480" cy="1417320"/>
+          </a:xfrm>
+          <a:prstGeom prst="roundRect">
+            <a:avLst>
+              <a:gd name="adj" fmla="val 6452"/>
+            </a:avLst>
+          </a:prstGeom>
+          <a:solidFill>
+            <a:srgbClr val="E8F8EF"/>
+          </a:solidFill>
+          <a:ln/>
+          <a:effectLst>
+            <a:outerShdw sx="100000" sy="100000" kx="0" ky="0" algn="bl" rotWithShape="0" blurRad="101600" dist="38100" dir="2700000">
+              <a:srgbClr val="000000">
+                <a:alpha val="12000"/>
+              </a:srgbClr>
+            </a:outerShdw>
+          </a:effectLst>
+        </p:spPr>
       </p:sp>
       <p:sp>
         <p:nvSpPr>
@@ -5469,8 +4647,8 @@
         </p:nvSpPr>
         <p:spPr>
           <a:xfrm>
-            <a:off x="457200" y="1737360"/>
-            <a:ext cx="8046720" cy="292608"/>
+            <a:off x="566928" y="2816352"/>
+            <a:ext cx="8229600" cy="237744"/>
           </a:xfrm>
           <a:prstGeom prst="rect">
             <a:avLst/>
@@ -5486,7 +4664,91 @@
               <a:buNone/>
             </a:pPr>
             <a:r>
-              <a:rPr lang="en-US" sz="1100" b="1" spc="200" kern="0" dirty="0">
+              <a:rPr lang="en-US" sz="1100" b="1" spc="100" kern="0" dirty="0">
+                <a:solidFill>
+                  <a:srgbClr val="34B76F"/>
+                </a:solidFill>
+                <a:latin typeface="Calibri" pitchFamily="34" charset="0"/>
+                <a:ea typeface="Calibri" pitchFamily="34" charset="-122"/>
+                <a:cs typeface="Calibri" pitchFamily="34" charset="-120"/>
+              </a:rPr>
+              <a:t>✅  CORRECTED</a:t>
+            </a:r>
+            <a:endParaRPr lang="en-US" sz="1100" dirty="0"/>
+          </a:p>
+        </p:txBody>
+      </p:sp>
+      <p:sp>
+        <p:nvSpPr>
+          <p:cNvPr id="9" name="Text 7"/>
+          <p:cNvSpPr/>
+          <p:nvPr/>
+        </p:nvSpPr>
+        <p:spPr>
+          <a:xfrm>
+            <a:off x="566928" y="3072384"/>
+            <a:ext cx="8010144" cy="685800"/>
+          </a:xfrm>
+          <a:prstGeom prst="rect">
+            <a:avLst/>
+          </a:prstGeom>
+          <a:noFill/>
+          <a:ln/>
+        </p:spPr>
+        <p:txBody>
+          <a:bodyPr wrap="square" lIns="0" tIns="0" rIns="0" bIns="0" rtlCol="0" anchor="ctr"/>
+          <a:lstStyle/>
+          <a:p>
+            <a:pPr indent="0" marL="0">
+              <a:buNone/>
+            </a:pPr>
+            <a:r>
+              <a:rPr lang="en-US" sz="1400" i="1" dirty="0">
+                <a:solidFill>
+                  <a:srgbClr val="1E293B"/>
+                </a:solidFill>
+                <a:latin typeface="Calibri" pitchFamily="34" charset="0"/>
+                <a:ea typeface="Calibri" pitchFamily="34" charset="-122"/>
+                <a:cs typeface="Calibri" pitchFamily="34" charset="-120"/>
+              </a:rPr>
+              <a:t>Corrected: Although Lucy was frightened, she kept walking deeper into the wood because she was curious.</a:t>
+            </a:r>
+            <a:endParaRPr lang="en-US" sz="1400" dirty="0"/>
+          </a:p>
+          <a:p>
+            <a:pPr indent="0" marL="0">
+              <a:buNone/>
+            </a:pPr>
+            <a:endParaRPr lang="en-US" sz="1400" dirty="0"/>
+          </a:p>
+        </p:txBody>
+      </p:sp>
+      <p:sp>
+        <p:nvSpPr>
+          <p:cNvPr id="10" name="Text 8"/>
+          <p:cNvSpPr/>
+          <p:nvPr/>
+        </p:nvSpPr>
+        <p:spPr>
+          <a:xfrm>
+            <a:off x="566928" y="3767328"/>
+            <a:ext cx="8010144" cy="320040"/>
+          </a:xfrm>
+          <a:prstGeom prst="rect">
+            <a:avLst/>
+          </a:prstGeom>
+          <a:noFill/>
+          <a:ln/>
+        </p:spPr>
+        <p:txBody>
+          <a:bodyPr wrap="square" lIns="0" tIns="0" rIns="0" bIns="0" rtlCol="0" anchor="ctr"/>
+          <a:lstStyle/>
+          <a:p>
+            <a:pPr indent="0" marL="0">
+              <a:buNone/>
+            </a:pPr>
+            <a:r>
+              <a:rPr lang="en-US" sz="1200" dirty="0">
                 <a:solidFill>
                   <a:srgbClr val="64748B"/>
                 </a:solidFill>
@@ -5494,48 +4756,9 @@
                 <a:ea typeface="Calibri" pitchFamily="34" charset="-122"/>
                 <a:cs typeface="Calibri" pitchFamily="34" charset="-120"/>
               </a:rPr>
-              <a:t>WHY</a:t>
-            </a:r>
-            <a:endParaRPr lang="en-US" sz="1100" dirty="0"/>
-          </a:p>
-        </p:txBody>
-      </p:sp>
-      <p:sp>
-        <p:nvSpPr>
-          <p:cNvPr id="9" name="Text 7"/>
-          <p:cNvSpPr/>
-          <p:nvPr/>
-        </p:nvSpPr>
-        <p:spPr>
-          <a:xfrm>
-            <a:off x="640080" y="2011680"/>
-            <a:ext cx="7863840" cy="502920"/>
-          </a:xfrm>
-          <a:prstGeom prst="rect">
-            <a:avLst/>
-          </a:prstGeom>
-          <a:noFill/>
-          <a:ln/>
-        </p:spPr>
-        <p:txBody>
-          <a:bodyPr wrap="square" lIns="0" tIns="0" rIns="0" bIns="0" rtlCol="0" anchor="ctr"/>
-          <a:lstStyle/>
-          <a:p>
-            <a:pPr indent="0" marL="0">
-              <a:buNone/>
-            </a:pPr>
-            <a:r>
-              <a:rPr lang="en-US" sz="1300" i="1" dirty="0">
-                <a:solidFill>
-                  <a:srgbClr val="64748B"/>
-                </a:solidFill>
-                <a:latin typeface="Calibri" pitchFamily="34" charset="0"/>
-                <a:ea typeface="Calibri" pitchFamily="34" charset="-122"/>
-                <a:cs typeface="Calibri" pitchFamily="34" charset="-120"/>
-              </a:rPr>
               <a:t>Although begins the dependent clause; comma after frightened separates it from the main clause; Lucy is a proper noun (capital); period ends.</a:t>
             </a:r>
-            <a:endParaRPr lang="en-US" sz="1300" dirty="0"/>
+            <a:endParaRPr lang="en-US" sz="1200" dirty="0"/>
           </a:p>
         </p:txBody>
       </p:sp>

--- a/Planning docs/Slides/lesson-25-4-teacher-slides.pptx
+++ b/Planning docs/Slides/lesson-25-4-teacher-slides.pptx
@@ -512,7 +512,7 @@
           <a:p>
             <a:r>
               <a:rPr lang="en-US" dirty="0"/>
-              <a:t>Lesson 25.4. Reading: Reading: Ch. 1–3.</a:t>
+              <a:t>Lesson 25.4. Reading: .</a:t>
             </a:r>
             <a:endParaRPr lang="en-US" dirty="0"/>
           </a:p>
@@ -1876,7 +1876,7 @@
                 <a:ea typeface="Calibri" pitchFamily="34" charset="-122"/>
                 <a:cs typeface="Calibri" pitchFamily="34" charset="-120"/>
               </a:rPr>
-              <a:t>Lesson 25.4  ·  Reading: Ch. 1–3</a:t>
+              <a:t>Lesson 25.4</a:t>
             </a:r>
             <a:endParaRPr lang="en-US" sz="2000" dirty="0"/>
           </a:p>
@@ -2243,121 +2243,9 @@
                 <a:ea typeface="Calibri" pitchFamily="34" charset="-122"/>
                 <a:cs typeface="Calibri" pitchFamily="34" charset="-120"/>
               </a:rPr>
-              <a:t>Reading: Ch. 1–3</a:t>
+              <a:t>Today’s chapters</a:t>
             </a:r>
             <a:endParaRPr lang="en-US" sz="2600" dirty="0"/>
-          </a:p>
-        </p:txBody>
-      </p:sp>
-      <p:sp>
-        <p:nvSpPr>
-          <p:cNvPr id="5" name="Text 3"/>
-          <p:cNvSpPr/>
-          <p:nvPr/>
-        </p:nvSpPr>
-        <p:spPr>
-          <a:xfrm>
-            <a:off x="365760" y="1463040"/>
-            <a:ext cx="8229600" cy="237744"/>
-          </a:xfrm>
-          <a:prstGeom prst="rect">
-            <a:avLst/>
-          </a:prstGeom>
-          <a:noFill/>
-          <a:ln/>
-        </p:spPr>
-        <p:txBody>
-          <a:bodyPr wrap="square" lIns="0" tIns="0" rIns="0" bIns="0" rtlCol="0" anchor="ctr"/>
-          <a:lstStyle/>
-          <a:p>
-            <a:pPr indent="0" marL="0">
-              <a:buNone/>
-            </a:pPr>
-            <a:r>
-              <a:rPr lang="en-US" sz="1100" b="1" spc="100" kern="0" dirty="0">
-                <a:solidFill>
-                  <a:srgbClr val="C7922C"/>
-                </a:solidFill>
-                <a:latin typeface="Calibri" pitchFamily="34" charset="0"/>
-                <a:ea typeface="Calibri" pitchFamily="34" charset="-122"/>
-                <a:cs typeface="Calibri" pitchFamily="34" charset="-120"/>
-              </a:rPr>
-              <a:t>PAUSE &amp; THINK</a:t>
-            </a:r>
-            <a:endParaRPr lang="en-US" sz="1100" dirty="0"/>
-          </a:p>
-        </p:txBody>
-      </p:sp>
-      <p:sp>
-        <p:nvSpPr>
-          <p:cNvPr id="6" name="Text 4"/>
-          <p:cNvSpPr/>
-          <p:nvPr/>
-        </p:nvSpPr>
-        <p:spPr>
-          <a:xfrm>
-            <a:off x="365760" y="1719072"/>
-            <a:ext cx="8412480" cy="914400"/>
-          </a:xfrm>
-          <a:prstGeom prst="rect">
-            <a:avLst/>
-          </a:prstGeom>
-          <a:noFill/>
-          <a:ln/>
-        </p:spPr>
-        <p:txBody>
-          <a:bodyPr wrap="square" lIns="0" tIns="0" rIns="0" bIns="0" rtlCol="0" anchor="ctr"/>
-          <a:lstStyle/>
-          <a:p>
-            <a:pPr indent="0" marL="0">
-              <a:buNone/>
-            </a:pPr>
-            <a:r>
-              <a:rPr lang="en-US" sz="1500" dirty="0">
-                <a:solidFill>
-                  <a:srgbClr val="1E293B"/>
-                </a:solidFill>
-                <a:latin typeface="Calibri" pitchFamily="34" charset="0"/>
-                <a:ea typeface="Calibri" pitchFamily="34" charset="-122"/>
-                <a:cs typeface="Calibri" pitchFamily="34" charset="-120"/>
-              </a:rPr>
-              <a:t>•  Orient yourself in fantasy settings.</a:t>
-            </a:r>
-            <a:endParaRPr lang="en-US" sz="1500" dirty="0"/>
-          </a:p>
-          <a:p>
-            <a:pPr indent="0" marL="0">
-              <a:buNone/>
-            </a:pPr>
-            <a:r>
-              <a:rPr lang="en-US" sz="1500" dirty="0">
-                <a:solidFill>
-                  <a:srgbClr val="1E293B"/>
-                </a:solidFill>
-                <a:latin typeface="Calibri" pitchFamily="34" charset="0"/>
-                <a:ea typeface="Calibri" pitchFamily="34" charset="-122"/>
-                <a:cs typeface="Calibri" pitchFamily="34" charset="-120"/>
-              </a:rPr>
-              <a:t>•  As you read today, ask yourself: What makes a reader believe in a fantasy world an author has invented?</a:t>
-            </a:r>
-            <a:endParaRPr lang="en-US" sz="1500" dirty="0"/>
-          </a:p>
-          <a:p>
-            <a:pPr indent="0" marL="0">
-              <a:buNone/>
-            </a:pPr>
-            <a:r>
-              <a:rPr lang="en-US" sz="1500" dirty="0">
-                <a:solidFill>
-                  <a:srgbClr val="1E293B"/>
-                </a:solidFill>
-                <a:latin typeface="Calibri" pitchFamily="34" charset="0"/>
-                <a:ea typeface="Calibri" pitchFamily="34" charset="-122"/>
-                <a:cs typeface="Calibri" pitchFamily="34" charset="-120"/>
-              </a:rPr>
-              <a:t>•  In the chapters you are reading, find one thing that is not a person but behaves like one. Copy the sentence and underline what gives it away.</a:t>
-            </a:r>
-            <a:endParaRPr lang="en-US" sz="1500" dirty="0"/>
           </a:p>
         </p:txBody>
       </p:sp>
@@ -3466,13 +3354,13 @@
             <a:r>
               <a:rPr lang="en-US" sz="1100" b="1" spc="100" kern="0" dirty="0">
                 <a:solidFill>
-                  <a:srgbClr val="8B6FC0"/>
-                </a:solidFill>
-                <a:latin typeface="Calibri" pitchFamily="34" charset="0"/>
-                <a:ea typeface="Calibri" pitchFamily="34" charset="-122"/>
-                <a:cs typeface="Calibri" pitchFamily="34" charset="-120"/>
-              </a:rPr>
-              <a:t>READING</a:t>
+                  <a:srgbClr val="C7922C"/>
+                </a:solidFill>
+                <a:latin typeface="Calibri" pitchFamily="34" charset="0"/>
+                <a:ea typeface="Calibri" pitchFamily="34" charset="-122"/>
+                <a:cs typeface="Calibri" pitchFamily="34" charset="-120"/>
+              </a:rPr>
+              <a:t>BIG QUESTION</a:t>
             </a:r>
             <a:endParaRPr lang="en-US" sz="1100" dirty="0"/>
           </a:p>
@@ -3480,91 +3368,13 @@
       </p:sp>
       <p:sp>
         <p:nvSpPr>
-          <p:cNvPr id="5" name="Text 3"/>
+          <p:cNvPr id="5" name="Shape 3"/>
           <p:cNvSpPr/>
           <p:nvPr/>
         </p:nvSpPr>
         <p:spPr>
           <a:xfrm>
             <a:off x="365760" y="1014984"/>
-            <a:ext cx="8412480" cy="365760"/>
-          </a:xfrm>
-          <a:prstGeom prst="rect">
-            <a:avLst/>
-          </a:prstGeom>
-          <a:noFill/>
-          <a:ln/>
-        </p:spPr>
-        <p:txBody>
-          <a:bodyPr wrap="square" lIns="0" tIns="0" rIns="0" bIns="0" rtlCol="0" anchor="ctr"/>
-          <a:lstStyle/>
-          <a:p>
-            <a:pPr indent="0" marL="0">
-              <a:buNone/>
-            </a:pPr>
-            <a:r>
-              <a:rPr lang="en-US" sz="2000" b="1" dirty="0">
-                <a:solidFill>
-                  <a:srgbClr val="0E1C42"/>
-                </a:solidFill>
-                <a:latin typeface="Calibri" pitchFamily="34" charset="0"/>
-                <a:ea typeface="Calibri" pitchFamily="34" charset="-122"/>
-                <a:cs typeface="Calibri" pitchFamily="34" charset="-120"/>
-              </a:rPr>
-              <a:t>Reading: Ch. 1–3</a:t>
-            </a:r>
-            <a:endParaRPr lang="en-US" sz="2000" dirty="0"/>
-          </a:p>
-        </p:txBody>
-      </p:sp>
-      <p:sp>
-        <p:nvSpPr>
-          <p:cNvPr id="6" name="Text 4"/>
-          <p:cNvSpPr/>
-          <p:nvPr/>
-        </p:nvSpPr>
-        <p:spPr>
-          <a:xfrm>
-            <a:off x="365760" y="1508760"/>
-            <a:ext cx="8229600" cy="237744"/>
-          </a:xfrm>
-          <a:prstGeom prst="rect">
-            <a:avLst/>
-          </a:prstGeom>
-          <a:noFill/>
-          <a:ln/>
-        </p:spPr>
-        <p:txBody>
-          <a:bodyPr wrap="square" lIns="0" tIns="0" rIns="0" bIns="0" rtlCol="0" anchor="ctr"/>
-          <a:lstStyle/>
-          <a:p>
-            <a:pPr indent="0" marL="0">
-              <a:buNone/>
-            </a:pPr>
-            <a:r>
-              <a:rPr lang="en-US" sz="1100" b="1" spc="100" kern="0" dirty="0">
-                <a:solidFill>
-                  <a:srgbClr val="C7922C"/>
-                </a:solidFill>
-                <a:latin typeface="Calibri" pitchFamily="34" charset="0"/>
-                <a:ea typeface="Calibri" pitchFamily="34" charset="-122"/>
-                <a:cs typeface="Calibri" pitchFamily="34" charset="-120"/>
-              </a:rPr>
-              <a:t>BIG QUESTION</a:t>
-            </a:r>
-            <a:endParaRPr lang="en-US" sz="1100" dirty="0"/>
-          </a:p>
-        </p:txBody>
-      </p:sp>
-      <p:sp>
-        <p:nvSpPr>
-          <p:cNvPr id="7" name="Shape 5"/>
-          <p:cNvSpPr/>
-          <p:nvPr/>
-        </p:nvSpPr>
-        <p:spPr>
-          <a:xfrm>
-            <a:off x="365760" y="1746504"/>
             <a:ext cx="8412480" cy="731520"/>
           </a:xfrm>
           <a:prstGeom prst="roundRect">
@@ -3592,91 +3402,91 @@
       </p:sp>
       <p:sp>
         <p:nvSpPr>
+          <p:cNvPr id="6" name="Text 4"/>
+          <p:cNvSpPr/>
+          <p:nvPr/>
+        </p:nvSpPr>
+        <p:spPr>
+          <a:xfrm>
+            <a:off x="594360" y="1143000"/>
+            <a:ext cx="7955280" cy="475488"/>
+          </a:xfrm>
+          <a:prstGeom prst="rect">
+            <a:avLst/>
+          </a:prstGeom>
+          <a:noFill/>
+          <a:ln/>
+        </p:spPr>
+        <p:txBody>
+          <a:bodyPr wrap="square" lIns="0" tIns="0" rIns="0" bIns="0" rtlCol="0" anchor="ctr"/>
+          <a:lstStyle/>
+          <a:p>
+            <a:pPr indent="0" marL="0">
+              <a:buNone/>
+            </a:pPr>
+            <a:r>
+              <a:rPr lang="en-US" sz="1700" dirty="0">
+                <a:solidFill>
+                  <a:srgbClr val="1E293B"/>
+                </a:solidFill>
+                <a:latin typeface="Calibri" pitchFamily="34" charset="0"/>
+                <a:ea typeface="Calibri" pitchFamily="34" charset="-122"/>
+                <a:cs typeface="Calibri" pitchFamily="34" charset="-120"/>
+              </a:rPr>
+              <a:t>Orient yourself in fantasy settings.</a:t>
+            </a:r>
+            <a:endParaRPr lang="en-US" sz="1700" dirty="0"/>
+          </a:p>
+        </p:txBody>
+      </p:sp>
+      <p:sp>
+        <p:nvSpPr>
+          <p:cNvPr id="7" name="Text 5"/>
+          <p:cNvSpPr/>
+          <p:nvPr/>
+        </p:nvSpPr>
+        <p:spPr>
+          <a:xfrm>
+            <a:off x="365760" y="1874520"/>
+            <a:ext cx="8229600" cy="237744"/>
+          </a:xfrm>
+          <a:prstGeom prst="rect">
+            <a:avLst/>
+          </a:prstGeom>
+          <a:noFill/>
+          <a:ln/>
+        </p:spPr>
+        <p:txBody>
+          <a:bodyPr wrap="square" lIns="0" tIns="0" rIns="0" bIns="0" rtlCol="0" anchor="ctr"/>
+          <a:lstStyle/>
+          <a:p>
+            <a:pPr indent="0" marL="0">
+              <a:buNone/>
+            </a:pPr>
+            <a:r>
+              <a:rPr lang="en-US" sz="1100" b="1" spc="100" kern="0" dirty="0">
+                <a:solidFill>
+                  <a:srgbClr val="55C8E8"/>
+                </a:solidFill>
+                <a:latin typeface="Calibri" pitchFamily="34" charset="0"/>
+                <a:ea typeface="Calibri" pitchFamily="34" charset="-122"/>
+                <a:cs typeface="Calibri" pitchFamily="34" charset="-120"/>
+              </a:rPr>
+              <a:t>READING LENS</a:t>
+            </a:r>
+            <a:endParaRPr lang="en-US" sz="1100" dirty="0"/>
+          </a:p>
+        </p:txBody>
+      </p:sp>
+      <p:sp>
+        <p:nvSpPr>
           <p:cNvPr id="8" name="Text 6"/>
           <p:cNvSpPr/>
           <p:nvPr/>
         </p:nvSpPr>
         <p:spPr>
           <a:xfrm>
-            <a:off x="594360" y="1874520"/>
-            <a:ext cx="7955280" cy="475488"/>
-          </a:xfrm>
-          <a:prstGeom prst="rect">
-            <a:avLst/>
-          </a:prstGeom>
-          <a:noFill/>
-          <a:ln/>
-        </p:spPr>
-        <p:txBody>
-          <a:bodyPr wrap="square" lIns="0" tIns="0" rIns="0" bIns="0" rtlCol="0" anchor="ctr"/>
-          <a:lstStyle/>
-          <a:p>
-            <a:pPr indent="0" marL="0">
-              <a:buNone/>
-            </a:pPr>
-            <a:r>
-              <a:rPr lang="en-US" sz="1700" dirty="0">
-                <a:solidFill>
-                  <a:srgbClr val="1E293B"/>
-                </a:solidFill>
-                <a:latin typeface="Calibri" pitchFamily="34" charset="0"/>
-                <a:ea typeface="Calibri" pitchFamily="34" charset="-122"/>
-                <a:cs typeface="Calibri" pitchFamily="34" charset="-120"/>
-              </a:rPr>
-              <a:t>Orient yourself in fantasy settings.</a:t>
-            </a:r>
-            <a:endParaRPr lang="en-US" sz="1700" dirty="0"/>
-          </a:p>
-        </p:txBody>
-      </p:sp>
-      <p:sp>
-        <p:nvSpPr>
-          <p:cNvPr id="9" name="Text 7"/>
-          <p:cNvSpPr/>
-          <p:nvPr/>
-        </p:nvSpPr>
-        <p:spPr>
-          <a:xfrm>
-            <a:off x="365760" y="2606040"/>
-            <a:ext cx="8229600" cy="237744"/>
-          </a:xfrm>
-          <a:prstGeom prst="rect">
-            <a:avLst/>
-          </a:prstGeom>
-          <a:noFill/>
-          <a:ln/>
-        </p:spPr>
-        <p:txBody>
-          <a:bodyPr wrap="square" lIns="0" tIns="0" rIns="0" bIns="0" rtlCol="0" anchor="ctr"/>
-          <a:lstStyle/>
-          <a:p>
-            <a:pPr indent="0" marL="0">
-              <a:buNone/>
-            </a:pPr>
-            <a:r>
-              <a:rPr lang="en-US" sz="1100" b="1" spc="100" kern="0" dirty="0">
-                <a:solidFill>
-                  <a:srgbClr val="55C8E8"/>
-                </a:solidFill>
-                <a:latin typeface="Calibri" pitchFamily="34" charset="0"/>
-                <a:ea typeface="Calibri" pitchFamily="34" charset="-122"/>
-                <a:cs typeface="Calibri" pitchFamily="34" charset="-120"/>
-              </a:rPr>
-              <a:t>READING LENS</a:t>
-            </a:r>
-            <a:endParaRPr lang="en-US" sz="1100" dirty="0"/>
-          </a:p>
-        </p:txBody>
-      </p:sp>
-      <p:sp>
-        <p:nvSpPr>
-          <p:cNvPr id="10" name="Text 8"/>
-          <p:cNvSpPr/>
-          <p:nvPr/>
-        </p:nvSpPr>
-        <p:spPr>
-          <a:xfrm>
-            <a:off x="365760" y="2843784"/>
+            <a:off x="365760" y="2112264"/>
             <a:ext cx="8412480" cy="914400"/>
           </a:xfrm>
           <a:prstGeom prst="rect">
